--- a/docs/weekly/w01/week1_onboarding.pptx
+++ b/docs/weekly/w01/week1_onboarding.pptx
@@ -5,16 +5,29 @@
     <p:sldMasterId id="2147483648" r:id="rId1"/>
   </p:sldMasterIdLst>
   <p:sldIdLst>
-    <p:sldId id="256" r:id="rId2"/>
+    <p:sldId id="267" r:id="rId2"/>
     <p:sldId id="257" r:id="rId3"/>
     <p:sldId id="263" r:id="rId4"/>
-    <p:sldId id="262" r:id="rId5"/>
-    <p:sldId id="261" r:id="rId6"/>
-    <p:sldId id="266" r:id="rId7"/>
-    <p:sldId id="265" r:id="rId8"/>
-    <p:sldId id="264" r:id="rId9"/>
-    <p:sldId id="258" r:id="rId10"/>
-    <p:sldId id="259" r:id="rId11"/>
+    <p:sldId id="261" r:id="rId5"/>
+    <p:sldId id="266" r:id="rId6"/>
+    <p:sldId id="265" r:id="rId7"/>
+    <p:sldId id="258" r:id="rId8"/>
+    <p:sldId id="262" r:id="rId9"/>
+    <p:sldId id="268" r:id="rId10"/>
+    <p:sldId id="270" r:id="rId11"/>
+    <p:sldId id="272" r:id="rId12"/>
+    <p:sldId id="269" r:id="rId13"/>
+    <p:sldId id="273" r:id="rId14"/>
+    <p:sldId id="274" r:id="rId15"/>
+    <p:sldId id="275" r:id="rId16"/>
+    <p:sldId id="276" r:id="rId17"/>
+    <p:sldId id="278" r:id="rId18"/>
+    <p:sldId id="271" r:id="rId19"/>
+    <p:sldId id="279" r:id="rId20"/>
+    <p:sldId id="281" r:id="rId21"/>
+    <p:sldId id="280" r:id="rId22"/>
+    <p:sldId id="264" r:id="rId23"/>
+    <p:sldId id="282" r:id="rId24"/>
   </p:sldIdLst>
   <p:sldSz cx="12192000" cy="6858000"/>
   <p:notesSz cx="6858000" cy="9144000"/>
@@ -113,6 +126,11 @@
       </a:defRPr>
     </a:lvl9pPr>
   </p:defaultTextStyle>
+  <p:extLst>
+    <p:ext uri="{EFAFB233-063F-42B5-8137-9DF3F51BA10A}">
+      <p15:sldGuideLst xmlns:p15="http://schemas.microsoft.com/office/powerpoint/2012/main"/>
+    </p:ext>
+  </p:extLst>
 </p:presentation>
 </file>
 
@@ -263,7 +281,7 @@
           <a:p>
             <a:fld id="{7AA8C377-EEFB-4C45-8407-C8CDC7CEF1A6}" type="datetimeFigureOut">
               <a:rPr lang="en-US" smtClean="0"/>
-              <a:t>10/8/26</a:t>
+              <a:t>10/9/26</a:t>
             </a:fld>
             <a:endParaRPr lang="en-US"/>
           </a:p>
@@ -461,7 +479,7 @@
           <a:p>
             <a:fld id="{7AA8C377-EEFB-4C45-8407-C8CDC7CEF1A6}" type="datetimeFigureOut">
               <a:rPr lang="en-US" smtClean="0"/>
-              <a:t>10/8/26</a:t>
+              <a:t>10/9/26</a:t>
             </a:fld>
             <a:endParaRPr lang="en-US"/>
           </a:p>
@@ -669,7 +687,7 @@
           <a:p>
             <a:fld id="{7AA8C377-EEFB-4C45-8407-C8CDC7CEF1A6}" type="datetimeFigureOut">
               <a:rPr lang="en-US" smtClean="0"/>
-              <a:t>10/8/26</a:t>
+              <a:t>10/9/26</a:t>
             </a:fld>
             <a:endParaRPr lang="en-US"/>
           </a:p>
@@ -867,7 +885,7 @@
           <a:p>
             <a:fld id="{7AA8C377-EEFB-4C45-8407-C8CDC7CEF1A6}" type="datetimeFigureOut">
               <a:rPr lang="en-US" smtClean="0"/>
-              <a:t>10/8/26</a:t>
+              <a:t>10/9/26</a:t>
             </a:fld>
             <a:endParaRPr lang="en-US"/>
           </a:p>
@@ -1142,7 +1160,7 @@
           <a:p>
             <a:fld id="{7AA8C377-EEFB-4C45-8407-C8CDC7CEF1A6}" type="datetimeFigureOut">
               <a:rPr lang="en-US" smtClean="0"/>
-              <a:t>10/8/26</a:t>
+              <a:t>10/9/26</a:t>
             </a:fld>
             <a:endParaRPr lang="en-US"/>
           </a:p>
@@ -1407,7 +1425,7 @@
           <a:p>
             <a:fld id="{7AA8C377-EEFB-4C45-8407-C8CDC7CEF1A6}" type="datetimeFigureOut">
               <a:rPr lang="en-US" smtClean="0"/>
-              <a:t>10/8/26</a:t>
+              <a:t>10/9/26</a:t>
             </a:fld>
             <a:endParaRPr lang="en-US"/>
           </a:p>
@@ -1819,7 +1837,7 @@
           <a:p>
             <a:fld id="{7AA8C377-EEFB-4C45-8407-C8CDC7CEF1A6}" type="datetimeFigureOut">
               <a:rPr lang="en-US" smtClean="0"/>
-              <a:t>10/8/26</a:t>
+              <a:t>10/9/26</a:t>
             </a:fld>
             <a:endParaRPr lang="en-US"/>
           </a:p>
@@ -1960,7 +1978,7 @@
           <a:p>
             <a:fld id="{7AA8C377-EEFB-4C45-8407-C8CDC7CEF1A6}" type="datetimeFigureOut">
               <a:rPr lang="en-US" smtClean="0"/>
-              <a:t>10/8/26</a:t>
+              <a:t>10/9/26</a:t>
             </a:fld>
             <a:endParaRPr lang="en-US"/>
           </a:p>
@@ -2073,7 +2091,7 @@
           <a:p>
             <a:fld id="{7AA8C377-EEFB-4C45-8407-C8CDC7CEF1A6}" type="datetimeFigureOut">
               <a:rPr lang="en-US" smtClean="0"/>
-              <a:t>10/8/26</a:t>
+              <a:t>10/9/26</a:t>
             </a:fld>
             <a:endParaRPr lang="en-US"/>
           </a:p>
@@ -2384,7 +2402,7 @@
           <a:p>
             <a:fld id="{7AA8C377-EEFB-4C45-8407-C8CDC7CEF1A6}" type="datetimeFigureOut">
               <a:rPr lang="en-US" smtClean="0"/>
-              <a:t>10/8/26</a:t>
+              <a:t>10/9/26</a:t>
             </a:fld>
             <a:endParaRPr lang="en-US"/>
           </a:p>
@@ -2672,7 +2690,7 @@
           <a:p>
             <a:fld id="{7AA8C377-EEFB-4C45-8407-C8CDC7CEF1A6}" type="datetimeFigureOut">
               <a:rPr lang="en-US" smtClean="0"/>
-              <a:t>10/8/26</a:t>
+              <a:t>10/9/26</a:t>
             </a:fld>
             <a:endParaRPr lang="en-US"/>
           </a:p>
@@ -2913,7 +2931,7 @@
           <a:p>
             <a:fld id="{7AA8C377-EEFB-4C45-8407-C8CDC7CEF1A6}" type="datetimeFigureOut">
               <a:rPr lang="en-US" smtClean="0"/>
-              <a:t>10/8/26</a:t>
+              <a:t>10/9/26</a:t>
             </a:fld>
             <a:endParaRPr lang="en-US"/>
           </a:p>
@@ -3335,7 +3353,7 @@
           <p:cNvPr id="2" name="Title 1">
             <a:extLst>
               <a:ext uri="{FF2B5EF4-FFF2-40B4-BE49-F238E27FC236}">
-                <a16:creationId xmlns:a16="http://schemas.microsoft.com/office/drawing/2014/main" id="{DB31C2BB-587D-E945-7D4E-531D9EE50AC2}"/>
+                <a16:creationId xmlns:a16="http://schemas.microsoft.com/office/drawing/2014/main" id="{0BD4E94F-39FC-A9F9-D3E9-64D59CA5E417}"/>
               </a:ext>
             </a:extLst>
           </p:cNvPr>
@@ -3346,21 +3364,21 @@
             <p:ph type="ctrTitle"/>
           </p:nvPr>
         </p:nvSpPr>
-        <p:spPr/>
+        <p:spPr>
+          <a:xfrm>
+            <a:off x="1524000" y="1122363"/>
+            <a:ext cx="9144000" cy="2387600"/>
+          </a:xfrm>
+        </p:spPr>
         <p:txBody>
           <a:bodyPr/>
           <a:lstStyle/>
           <a:p>
-            <a:r>
-              <a:rPr lang="en-US" dirty="0"/>
-              <a:t>"Abstain-DTI"</a:t>
-            </a:r>
-            <a:br>
-              <a:rPr lang="en-US" dirty="0"/>
-            </a:br>
-            <a:r>
-              <a:rPr lang="en-US" dirty="0"/>
-              <a:t>week 1</a:t>
+            <a:pPr marL="0" lvl="0" indent="0">
+              <a:buNone/>
+            </a:pPr>
+            <a:r>
+              <a:t>Abstain-DTI</a:t>
             </a:r>
           </a:p>
         </p:txBody>
@@ -3370,7 +3388,7 @@
           <p:cNvPr id="3" name="Subtitle 2">
             <a:extLst>
               <a:ext uri="{FF2B5EF4-FFF2-40B4-BE49-F238E27FC236}">
-                <a16:creationId xmlns:a16="http://schemas.microsoft.com/office/drawing/2014/main" id="{4A7726A3-F720-B67D-6E3F-469DF2B6DF5A}"/>
+                <a16:creationId xmlns:a16="http://schemas.microsoft.com/office/drawing/2014/main" id="{CFDDF903-72F2-4677-3580-4F46C495AA44}"/>
               </a:ext>
             </a:extLst>
           </p:cNvPr>
@@ -3381,49 +3399,31 @@
             <p:ph type="subTitle" idx="1"/>
           </p:nvPr>
         </p:nvSpPr>
-        <p:spPr/>
+        <p:spPr>
+          <a:xfrm>
+            <a:off x="1524000" y="3602038"/>
+            <a:ext cx="9144000" cy="1655762"/>
+          </a:xfrm>
+        </p:spPr>
         <p:txBody>
           <a:bodyPr/>
           <a:lstStyle/>
           <a:p>
-            <a:pPr algn="r"/>
-            <a:r>
-              <a:rPr lang="en-US" dirty="0"/>
-              <a:t>2026.10.10</a:t>
-            </a:r>
-          </a:p>
-          <a:p>
-            <a:pPr algn="r"/>
-            <a:r>
-              <a:rPr lang="ko-KR" altLang="en-US" dirty="0"/>
-              <a:t>가짜연구소 </a:t>
-            </a:r>
-            <a:r>
-              <a:rPr lang="en-US" altLang="ko-KR" dirty="0"/>
-              <a:t>13</a:t>
-            </a:r>
-            <a:r>
-              <a:rPr lang="ko-KR" altLang="en-US" dirty="0"/>
-              <a:t>기 </a:t>
-            </a:r>
-            <a:endParaRPr lang="en-US" altLang="ko-KR" dirty="0"/>
-          </a:p>
-          <a:p>
-            <a:pPr algn="r"/>
-            <a:r>
-              <a:rPr lang="ko-KR" altLang="en-US" dirty="0"/>
-              <a:t>배예지</a:t>
-            </a:r>
-            <a:endParaRPr lang="en-US" dirty="0"/>
+            <a:pPr marL="0" lvl="0" indent="0">
+              <a:buNone/>
+            </a:pPr>
+            <a:r>
+              <a:t>week 1 · 2026.10.10</a:t>
+            </a:r>
+            <a:br/>
+            <a:br/>
+            <a:r>
+              <a:t>가짜연구소 13기 배예지</a:t>
+            </a:r>
           </a:p>
         </p:txBody>
       </p:sp>
     </p:spTree>
-    <p:extLst>
-      <p:ext uri="{BB962C8B-B14F-4D97-AF65-F5344CB8AC3E}">
-        <p14:creationId xmlns:p14="http://schemas.microsoft.com/office/powerpoint/2010/main" val="147884667"/>
-      </p:ext>
-    </p:extLst>
   </p:cSld>
   <p:clrMapOvr>
     <a:masterClrMapping/>
@@ -3453,7 +3453,7 @@
           <p:cNvPr id="2" name="Title 1">
             <a:extLst>
               <a:ext uri="{FF2B5EF4-FFF2-40B4-BE49-F238E27FC236}">
-                <a16:creationId xmlns:a16="http://schemas.microsoft.com/office/drawing/2014/main" id="{7D819A06-AA78-8CFA-3AD4-4FC26B2853EE}"/>
+                <a16:creationId xmlns:a16="http://schemas.microsoft.com/office/drawing/2014/main" id="{1A5592C5-AEA2-D627-F76B-35C7AD5ED253}"/>
               </a:ext>
             </a:extLst>
           </p:cNvPr>
@@ -3464,24 +3464,33 @@
             <p:ph type="title"/>
           </p:nvPr>
         </p:nvSpPr>
-        <p:spPr/>
+        <p:spPr>
+          <a:xfrm>
+            <a:off x="839788" y="457200"/>
+            <a:ext cx="4658969" cy="1044911"/>
+          </a:xfrm>
+        </p:spPr>
         <p:txBody>
           <a:bodyPr/>
           <a:lstStyle/>
           <a:p>
-            <a:r>
-              <a:rPr lang="en-US" dirty="0"/>
-              <a:t>Thank you!</a:t>
-            </a:r>
-          </a:p>
-        </p:txBody>
-      </p:sp>
-      <p:sp>
-        <p:nvSpPr>
-          <p:cNvPr id="3" name="Content Placeholder 2">
-            <a:extLst>
-              <a:ext uri="{FF2B5EF4-FFF2-40B4-BE49-F238E27FC236}">
-                <a16:creationId xmlns:a16="http://schemas.microsoft.com/office/drawing/2014/main" id="{C5398ADF-CEB0-FBFD-C294-F34A482604BC}"/>
+            <a:pPr marL="0" lvl="0" indent="0">
+              <a:buNone/>
+            </a:pPr>
+            <a:r>
+              <a:rPr lang="ko-KR" altLang="en-US" dirty="0"/>
+              <a:t>근거</a:t>
+            </a:r>
+            <a:endParaRPr dirty="0"/>
+          </a:p>
+        </p:txBody>
+      </p:sp>
+      <p:sp>
+        <p:nvSpPr>
+          <p:cNvPr id="4" name="Text Placeholder 3">
+            <a:extLst>
+              <a:ext uri="{FF2B5EF4-FFF2-40B4-BE49-F238E27FC236}">
+                <a16:creationId xmlns:a16="http://schemas.microsoft.com/office/drawing/2014/main" id="{67344C6D-89EA-24AC-1FF8-F95BD1763393}"/>
               </a:ext>
             </a:extLst>
           </p:cNvPr>
@@ -3489,22 +3498,3046 @@
             <a:spLocks noGrp="1"/>
           </p:cNvSpPr>
           <p:nvPr>
-            <p:ph idx="1"/>
-          </p:nvPr>
-        </p:nvSpPr>
-        <p:spPr/>
+            <p:ph type="body" sz="half" idx="2"/>
+          </p:nvPr>
+        </p:nvSpPr>
+        <p:spPr>
+          <a:xfrm>
+            <a:off x="839788" y="1606378"/>
+            <a:ext cx="10512424" cy="4262610"/>
+          </a:xfrm>
+        </p:spPr>
         <p:txBody>
           <a:bodyPr/>
           <a:lstStyle/>
           <a:p>
-            <a:endParaRPr lang="en-US" dirty="0"/>
-          </a:p>
-        </p:txBody>
-      </p:sp>
+            <a:pPr marL="0" lvl="0" indent="0">
+              <a:buNone/>
+            </a:pPr>
+            <a:r>
+              <a:rPr dirty="0" err="1"/>
+              <a:t>선행</a:t>
+            </a:r>
+            <a:r>
+              <a:rPr dirty="0"/>
+              <a:t> </a:t>
+            </a:r>
+            <a:r>
+              <a:rPr dirty="0" err="1"/>
+              <a:t>문헌</a:t>
+            </a:r>
+            <a:r>
+              <a:rPr dirty="0"/>
+              <a:t>(Medea, </a:t>
+            </a:r>
+            <a:r>
+              <a:rPr dirty="0" err="1"/>
+              <a:t>Biomni</a:t>
+            </a:r>
+            <a:r>
+              <a:rPr dirty="0"/>
+              <a:t>, </a:t>
+            </a:r>
+            <a:r>
+              <a:rPr dirty="0" err="1"/>
+              <a:t>ToolUniverse</a:t>
+            </a:r>
+            <a:r>
+              <a:rPr dirty="0"/>
+              <a:t>, </a:t>
+            </a:r>
+            <a:r>
+              <a:rPr dirty="0" err="1"/>
+              <a:t>DrugAgent</a:t>
+            </a:r>
+            <a:r>
+              <a:rPr dirty="0"/>
+              <a:t>, LAB-Bench, </a:t>
+            </a:r>
+            <a:r>
+              <a:rPr dirty="0" err="1"/>
+              <a:t>BixBench</a:t>
+            </a:r>
+            <a:r>
+              <a:rPr dirty="0"/>
+              <a:t>) </a:t>
+            </a:r>
+            <a:r>
+              <a:rPr dirty="0" err="1"/>
+              <a:t>중</a:t>
+            </a:r>
+            <a:r>
+              <a:rPr dirty="0"/>
+              <a:t> </a:t>
+            </a:r>
+            <a:r>
+              <a:rPr dirty="0" err="1"/>
+              <a:t>AURC나</a:t>
+            </a:r>
+            <a:r>
+              <a:rPr dirty="0"/>
+              <a:t> risk-</a:t>
+            </a:r>
+            <a:r>
+              <a:rPr dirty="0" err="1"/>
+              <a:t>coverage로</a:t>
+            </a:r>
+            <a:r>
+              <a:rPr dirty="0"/>
+              <a:t> </a:t>
+            </a:r>
+            <a:r>
+              <a:rPr dirty="0" err="1"/>
+              <a:t>신뢰도의</a:t>
+            </a:r>
+            <a:r>
+              <a:rPr dirty="0"/>
+              <a:t> </a:t>
+            </a:r>
+            <a:r>
+              <a:rPr dirty="0" err="1"/>
+              <a:t>순위를</a:t>
+            </a:r>
+            <a:r>
+              <a:rPr dirty="0"/>
+              <a:t> </a:t>
+            </a:r>
+            <a:r>
+              <a:rPr dirty="0" err="1"/>
+              <a:t>잰</a:t>
+            </a:r>
+            <a:r>
+              <a:rPr dirty="0"/>
+              <a:t> </a:t>
+            </a:r>
+            <a:r>
+              <a:rPr dirty="0" err="1"/>
+              <a:t>곳은</a:t>
+            </a:r>
+            <a:r>
+              <a:rPr dirty="0"/>
+              <a:t> </a:t>
+            </a:r>
+            <a:r>
+              <a:rPr dirty="0" err="1"/>
+              <a:t>없습니다</a:t>
+            </a:r>
+            <a:r>
+              <a:rPr dirty="0"/>
+              <a:t>.</a:t>
+            </a:r>
+          </a:p>
+        </p:txBody>
+      </p:sp>
+      <p:graphicFrame>
+        <p:nvGraphicFramePr>
+          <p:cNvPr id="6" name="Content Placeholder 5"/>
+          <p:cNvGraphicFramePr>
+            <a:graphicFrameLocks noGrp="1"/>
+          </p:cNvGraphicFramePr>
+          <p:nvPr>
+            <p:ph idx="1"/>
+            <p:extLst>
+              <p:ext uri="{D42A27DB-BD31-4B8C-83A1-F6EECF244321}">
+                <p14:modId xmlns:p14="http://schemas.microsoft.com/office/powerpoint/2010/main" val="1190644996"/>
+              </p:ext>
+            </p:extLst>
+          </p:nvPr>
+        </p:nvGraphicFramePr>
+        <p:xfrm>
+          <a:off x="975154" y="2451579"/>
+          <a:ext cx="10241692" cy="3870960"/>
+        </p:xfrm>
+        <a:graphic>
+          <a:graphicData uri="http://schemas.openxmlformats.org/drawingml/2006/table">
+            <a:tbl>
+              <a:tblPr firstRow="1" bandRow="1">
+                <a:tableStyleId>{5C22544A-7EE6-4342-B048-85BDC9FD1C3A}</a:tableStyleId>
+              </a:tblPr>
+              <a:tblGrid>
+                <a:gridCol w="2151105">
+                  <a:extLst>
+                    <a:ext uri="{9D8B030D-6E8A-4147-A177-3AD203B41FA5}">
+                      <a16:colId xmlns:a16="http://schemas.microsoft.com/office/drawing/2014/main" val="20000"/>
+                    </a:ext>
+                  </a:extLst>
+                </a:gridCol>
+                <a:gridCol w="8090587">
+                  <a:extLst>
+                    <a:ext uri="{9D8B030D-6E8A-4147-A177-3AD203B41FA5}">
+                      <a16:colId xmlns:a16="http://schemas.microsoft.com/office/drawing/2014/main" val="20001"/>
+                    </a:ext>
+                  </a:extLst>
+                </a:gridCol>
+              </a:tblGrid>
+              <a:tr h="0">
+                <a:tc>
+                  <a:txBody>
+                    <a:bodyPr/>
+                    <a:lstStyle/>
+                    <a:p>
+                      <a:pPr marL="0" lvl="0" indent="0">
+                        <a:buNone/>
+                      </a:pPr>
+                      <a:r>
+                        <a:rPr sz="1400" dirty="0" err="1"/>
+                        <a:t>근거</a:t>
+                      </a:r>
+                      <a:endParaRPr sz="1400" dirty="0"/>
+                    </a:p>
+                  </a:txBody>
+                  <a:tcPr/>
+                </a:tc>
+                <a:tc>
+                  <a:txBody>
+                    <a:bodyPr/>
+                    <a:lstStyle/>
+                    <a:p>
+                      <a:pPr marL="0" lvl="0" indent="0">
+                        <a:buNone/>
+                      </a:pPr>
+                      <a:r>
+                        <a:rPr sz="1400" dirty="0" err="1"/>
+                        <a:t>내용</a:t>
+                      </a:r>
+                      <a:endParaRPr sz="1400" dirty="0"/>
+                    </a:p>
+                  </a:txBody>
+                  <a:tcPr/>
+                </a:tc>
+                <a:extLst>
+                  <a:ext uri="{0D108BD9-81ED-4DB2-BD59-A6C34878D82A}">
+                    <a16:rowId xmlns:a16="http://schemas.microsoft.com/office/drawing/2014/main" val="10000"/>
+                  </a:ext>
+                </a:extLst>
+              </a:tr>
+              <a:tr h="0">
+                <a:tc>
+                  <a:txBody>
+                    <a:bodyPr/>
+                    <a:lstStyle/>
+                    <a:p>
+                      <a:pPr marL="0" lvl="0" indent="0">
+                        <a:buNone/>
+                      </a:pPr>
+                      <a:r>
+                        <a:rPr sz="1400" dirty="0"/>
+                        <a:t>LAB-Bench</a:t>
+                      </a:r>
+                    </a:p>
+                  </a:txBody>
+                  <a:tcPr/>
+                </a:tc>
+                <a:tc>
+                  <a:txBody>
+                    <a:bodyPr/>
+                    <a:lstStyle/>
+                    <a:p>
+                      <a:pPr marL="0" lvl="0" indent="0">
+                        <a:buNone/>
+                      </a:pPr>
+                      <a:r>
+                        <a:rPr lang="en-US" sz="1400" dirty="0"/>
+                        <a:t>LAB-Bench</a:t>
+                      </a:r>
+                      <a:r>
+                        <a:rPr lang="ko-KR" altLang="en-US" sz="1400" dirty="0"/>
+                        <a:t>는 생물학 연구 과제로 </a:t>
+                      </a:r>
+                      <a:r>
+                        <a:rPr lang="en-US" sz="1400" dirty="0"/>
+                        <a:t>LLM</a:t>
+                      </a:r>
+                      <a:r>
+                        <a:rPr lang="ko-KR" altLang="en-US" sz="1400" dirty="0"/>
+                        <a:t>을 시험하는 벤치마크입니다</a:t>
+                      </a:r>
+                      <a:r>
+                        <a:rPr lang="en-US" altLang="ko-KR" sz="1400" dirty="0"/>
+                        <a:t>. </a:t>
+                      </a:r>
+                      <a:r>
+                        <a:rPr lang="ko-KR" altLang="en-US" sz="1400" dirty="0"/>
+                        <a:t>모든 문항에 “정보가 부족해 답할 수 없다” 보기를 주고</a:t>
+                      </a:r>
+                      <a:r>
+                        <a:rPr lang="en-US" altLang="ko-KR" sz="1400" dirty="0"/>
+                        <a:t>, </a:t>
+                      </a:r>
+                      <a:r>
+                        <a:rPr lang="ko-KR" altLang="en-US" sz="1400" dirty="0"/>
+                        <a:t>답한 문항 비율</a:t>
+                      </a:r>
+                      <a:r>
+                        <a:rPr lang="en-US" altLang="ko-KR" sz="1400" dirty="0"/>
+                        <a:t>(</a:t>
+                      </a:r>
+                      <a:r>
+                        <a:rPr lang="en-US" sz="1400" dirty="0"/>
+                        <a:t>coverage)</a:t>
+                      </a:r>
+                      <a:r>
+                        <a:rPr lang="ko-KR" altLang="en-US" sz="1400" dirty="0"/>
+                        <a:t>과 답한 문항 중 정답 비율</a:t>
+                      </a:r>
+                      <a:r>
+                        <a:rPr lang="en-US" altLang="ko-KR" sz="1400" dirty="0"/>
+                        <a:t>(</a:t>
+                      </a:r>
+                      <a:r>
+                        <a:rPr lang="en-US" sz="1400" dirty="0"/>
+                        <a:t>precision)</a:t>
+                      </a:r>
+                      <a:r>
+                        <a:rPr lang="ko-KR" altLang="en-US" sz="1400" dirty="0"/>
+                        <a:t>을 따로 봅니다</a:t>
+                      </a:r>
+                      <a:r>
+                        <a:rPr lang="en-US" altLang="ko-KR" sz="1400" dirty="0"/>
+                        <a:t>.</a:t>
+                      </a:r>
+                    </a:p>
+                    <a:p>
+                      <a:pPr marL="228600" lvl="0" indent="-228600">
+                        <a:buFont typeface="Arial" panose="020B0604020202020204" pitchFamily="34" charset="0"/>
+                        <a:buChar char="•"/>
+                      </a:pPr>
+                      <a:r>
+                        <a:rPr lang="en-US" sz="1400" dirty="0"/>
+                        <a:t>Cloning Scenarios </a:t>
+                      </a:r>
+                      <a:r>
+                        <a:rPr lang="ko-KR" altLang="en-US" sz="1400" dirty="0"/>
+                        <a:t>과제에서 </a:t>
+                      </a:r>
+                      <a:r>
+                        <a:rPr lang="en-US" sz="1400" dirty="0"/>
+                        <a:t>Gemini 1.5 Pro</a:t>
+                      </a:r>
+                      <a:r>
+                        <a:rPr lang="ko-KR" altLang="en-US" sz="1400" dirty="0"/>
+                        <a:t>와 </a:t>
+                      </a:r>
+                      <a:r>
+                        <a:rPr lang="en-US" sz="1400" dirty="0"/>
+                        <a:t>GPT-4-turbo</a:t>
+                      </a:r>
+                      <a:r>
+                        <a:rPr lang="ko-KR" altLang="en-US" sz="1400" dirty="0"/>
+                        <a:t>는 다른 모델보다 기권을 많이 했습니다</a:t>
+                      </a:r>
+                      <a:r>
+                        <a:rPr lang="en-US" altLang="ko-KR" sz="1400" dirty="0"/>
+                        <a:t>.</a:t>
+                      </a:r>
+                    </a:p>
+                    <a:p>
+                      <a:pPr marL="228600" lvl="0" indent="-228600">
+                        <a:buFont typeface="Arial" panose="020B0604020202020204" pitchFamily="34" charset="0"/>
+                        <a:buChar char="•"/>
+                      </a:pPr>
+                      <a:r>
+                        <a:rPr lang="ko-KR" altLang="en-US" sz="1400" dirty="0"/>
+                        <a:t>그런데 답한 문항만 놓고 봐도 </a:t>
+                      </a:r>
+                      <a:r>
+                        <a:rPr lang="ko-KR" altLang="en-US" sz="1400" dirty="0" err="1"/>
+                        <a:t>정답률이</a:t>
+                      </a:r>
+                      <a:r>
+                        <a:rPr lang="ko-KR" altLang="en-US" sz="1400" dirty="0"/>
+                        <a:t> 가장 낮았습니다</a:t>
+                      </a:r>
+                      <a:r>
+                        <a:rPr lang="en-US" altLang="ko-KR" sz="1400" dirty="0"/>
+                        <a:t>. </a:t>
+                      </a:r>
+                      <a:r>
+                        <a:rPr lang="ko-KR" altLang="en-US" sz="1400" dirty="0"/>
+                        <a:t>기권을 많이 해도 </a:t>
+                      </a:r>
+                      <a:r>
+                        <a:rPr lang="ko-KR" altLang="en-US" sz="1400" dirty="0" err="1"/>
+                        <a:t>정답률은</a:t>
+                      </a:r>
+                      <a:r>
+                        <a:rPr lang="ko-KR" altLang="en-US" sz="1400" dirty="0"/>
+                        <a:t> 오르지 않았습니다</a:t>
+                      </a:r>
+                      <a:r>
+                        <a:rPr lang="en-US" altLang="ko-KR" sz="1400" dirty="0"/>
+                        <a:t>.</a:t>
+                      </a:r>
+                    </a:p>
+                  </a:txBody>
+                  <a:tcPr/>
+                </a:tc>
+                <a:extLst>
+                  <a:ext uri="{0D108BD9-81ED-4DB2-BD59-A6C34878D82A}">
+                    <a16:rowId xmlns:a16="http://schemas.microsoft.com/office/drawing/2014/main" val="10001"/>
+                  </a:ext>
+                </a:extLst>
+              </a:tr>
+              <a:tr h="0">
+                <a:tc>
+                  <a:txBody>
+                    <a:bodyPr/>
+                    <a:lstStyle/>
+                    <a:p>
+                      <a:pPr marL="0" lvl="0" indent="0">
+                        <a:buNone/>
+                      </a:pPr>
+                      <a:r>
+                        <a:rPr sz="1400"/>
+                        <a:t>DrugAgent (kinase)</a:t>
+                      </a:r>
+                    </a:p>
+                  </a:txBody>
+                  <a:tcPr/>
+                </a:tc>
+                <a:tc>
+                  <a:txBody>
+                    <a:bodyPr/>
+                    <a:lstStyle/>
+                    <a:p>
+                      <a:pPr marL="0" lvl="0" indent="0">
+                        <a:buNone/>
+                      </a:pPr>
+                      <a:r>
+                        <a:rPr lang="en-US" sz="1400" dirty="0" err="1"/>
+                        <a:t>DrugAgent</a:t>
+                      </a:r>
+                      <a:r>
+                        <a:rPr lang="ko-KR" altLang="en-US" sz="1400" dirty="0"/>
+                        <a:t>는 </a:t>
+                      </a:r>
+                      <a:r>
+                        <a:rPr lang="en-US" sz="1400" dirty="0"/>
+                        <a:t>LLM </a:t>
+                      </a:r>
+                      <a:r>
+                        <a:rPr lang="ko-KR" altLang="en-US" sz="1400" dirty="0"/>
+                        <a:t>여러 개가 문헌과 </a:t>
+                      </a:r>
+                      <a:r>
+                        <a:rPr lang="en-US" sz="1400" dirty="0"/>
+                        <a:t>DB</a:t>
+                      </a:r>
+                      <a:r>
+                        <a:rPr lang="ko-KR" altLang="en-US" sz="1400" dirty="0" err="1"/>
+                        <a:t>를</a:t>
+                      </a:r>
+                      <a:r>
+                        <a:rPr lang="ko-KR" altLang="en-US" sz="1400" dirty="0"/>
+                        <a:t> 찾아보고 약이 타겟에 붙는지 판단하는 에이전트입니다</a:t>
+                      </a:r>
+                      <a:r>
+                        <a:rPr lang="en-US" altLang="ko-KR" sz="1400" dirty="0"/>
+                        <a:t>. </a:t>
+                      </a:r>
+                      <a:r>
+                        <a:rPr lang="ko-KR" altLang="en-US" sz="1400" dirty="0"/>
+                        <a:t>저자들은 </a:t>
+                      </a:r>
+                      <a:r>
+                        <a:rPr lang="en-US" sz="1400" dirty="0"/>
+                        <a:t>kinase </a:t>
+                      </a:r>
+                      <a:r>
+                        <a:rPr lang="ko-KR" altLang="en-US" sz="1400" dirty="0"/>
+                        <a:t>평가 문제를 </a:t>
+                      </a:r>
+                      <a:r>
+                        <a:rPr lang="en-US" altLang="ko-KR" sz="1400" dirty="0"/>
+                        <a:t>"</a:t>
+                      </a:r>
+                      <a:r>
+                        <a:rPr lang="ko-KR" altLang="en-US" sz="1400" dirty="0"/>
+                        <a:t>그 약</a:t>
+                      </a:r>
+                      <a:r>
+                        <a:rPr lang="en-US" altLang="ko-KR" sz="1400" dirty="0"/>
+                        <a:t>-</a:t>
+                      </a:r>
+                      <a:r>
+                        <a:rPr lang="ko-KR" altLang="en-US" sz="1400" dirty="0"/>
+                        <a:t>타겟 쌍을 직접 다룬 논문이 몇 편 있는가</a:t>
+                      </a:r>
+                      <a:r>
+                        <a:rPr lang="en-US" altLang="ko-KR" sz="1400" dirty="0"/>
+                        <a:t>"</a:t>
+                      </a:r>
+                      <a:r>
+                        <a:rPr lang="ko-KR" altLang="en-US" sz="1400" dirty="0"/>
+                        <a:t>로 나눠서 정확도를 봤습니다</a:t>
+                      </a:r>
+                      <a:r>
+                        <a:rPr lang="en-US" altLang="ko-KR" sz="1400" dirty="0"/>
+                        <a:t>.</a:t>
+                      </a:r>
+                    </a:p>
+                    <a:p>
+                      <a:pPr marL="0" lvl="0" indent="0">
+                        <a:buNone/>
+                      </a:pPr>
+                      <a:r>
+                        <a:rPr lang="en-US" altLang="ko-KR" sz="1400" dirty="0"/>
+                        <a:t>- </a:t>
+                      </a:r>
+                      <a:r>
+                        <a:rPr lang="ko-KR" altLang="en-US" sz="1400" dirty="0"/>
+                        <a:t>논문이 </a:t>
+                      </a:r>
+                      <a:r>
+                        <a:rPr lang="en-US" altLang="ko-KR" sz="1400" dirty="0"/>
+                        <a:t>1</a:t>
+                      </a:r>
+                      <a:r>
+                        <a:rPr lang="ko-KR" altLang="en-US" sz="1400" dirty="0"/>
+                        <a:t>편 이상 있으면 </a:t>
+                      </a:r>
+                      <a:r>
+                        <a:rPr lang="en-US" sz="1400" dirty="0" err="1"/>
+                        <a:t>DrugAgent</a:t>
+                      </a:r>
+                      <a:r>
+                        <a:rPr lang="ko-KR" altLang="en-US" sz="1400" dirty="0"/>
+                        <a:t>가 일반 </a:t>
+                      </a:r>
+                      <a:r>
+                        <a:rPr lang="en-US" sz="1400" dirty="0"/>
+                        <a:t>ML </a:t>
+                      </a:r>
+                      <a:r>
+                        <a:rPr lang="ko-KR" altLang="en-US" sz="1400" dirty="0"/>
+                        <a:t>모델</a:t>
+                      </a:r>
+                      <a:r>
+                        <a:rPr lang="en-US" altLang="ko-KR" sz="1400" dirty="0"/>
+                        <a:t>(</a:t>
+                      </a:r>
+                      <a:r>
+                        <a:rPr lang="en-US" sz="1400" dirty="0"/>
+                        <a:t>ML+KG)</a:t>
+                      </a:r>
+                      <a:r>
+                        <a:rPr lang="ko-KR" altLang="en-US" sz="1400" dirty="0"/>
+                        <a:t>보다 잘 맞혔습니다</a:t>
+                      </a:r>
+                      <a:r>
+                        <a:rPr lang="en-US" altLang="ko-KR" sz="1400" dirty="0"/>
+                        <a:t>.</a:t>
+                      </a:r>
+                    </a:p>
+                    <a:p>
+                      <a:pPr marL="0" lvl="0" indent="0">
+                        <a:buNone/>
+                      </a:pPr>
+                      <a:r>
+                        <a:rPr lang="en-US" altLang="ko-KR" sz="1400" dirty="0"/>
+                        <a:t>- </a:t>
+                      </a:r>
+                      <a:r>
+                        <a:rPr lang="ko-KR" altLang="en-US" sz="1400" dirty="0"/>
+                        <a:t>논문이 </a:t>
+                      </a:r>
+                      <a:r>
+                        <a:rPr lang="en-US" altLang="ko-KR" sz="1400" dirty="0"/>
+                        <a:t>0</a:t>
+                      </a:r>
+                      <a:r>
+                        <a:rPr lang="ko-KR" altLang="en-US" sz="1400" dirty="0"/>
+                        <a:t>편이면 일반 </a:t>
+                      </a:r>
+                      <a:r>
+                        <a:rPr lang="en-US" sz="1400" dirty="0"/>
+                        <a:t>ML </a:t>
+                      </a:r>
+                      <a:r>
+                        <a:rPr lang="ko-KR" altLang="en-US" sz="1400" dirty="0"/>
+                        <a:t>모델과 비슷하거나 더 못했습니다</a:t>
+                      </a:r>
+                      <a:r>
+                        <a:rPr lang="en-US" altLang="ko-KR" sz="1400" dirty="0"/>
+                        <a:t>.</a:t>
+                      </a:r>
+                      <a:endParaRPr sz="1400" dirty="0"/>
+                    </a:p>
+                  </a:txBody>
+                  <a:tcPr/>
+                </a:tc>
+                <a:extLst>
+                  <a:ext uri="{0D108BD9-81ED-4DB2-BD59-A6C34878D82A}">
+                    <a16:rowId xmlns:a16="http://schemas.microsoft.com/office/drawing/2014/main" val="10002"/>
+                  </a:ext>
+                </a:extLst>
+              </a:tr>
+              <a:tr h="0">
+                <a:tc>
+                  <a:txBody>
+                    <a:bodyPr/>
+                    <a:lstStyle/>
+                    <a:p>
+                      <a:pPr marL="0" lvl="0" indent="0">
+                        <a:buNone/>
+                      </a:pPr>
+                      <a:r>
+                        <a:rPr sz="1400"/>
+                        <a:t>기권 채점</a:t>
+                      </a:r>
+                    </a:p>
+                  </a:txBody>
+                  <a:tcPr/>
+                </a:tc>
+                <a:tc>
+                  <a:txBody>
+                    <a:bodyPr/>
+                    <a:lstStyle/>
+                    <a:p>
+                      <a:pPr marL="0" marR="0" lvl="0" indent="0" algn="l" defTabSz="914400" rtl="0" eaLnBrk="1" fontAlgn="auto" latinLnBrk="0" hangingPunct="1">
+                        <a:lnSpc>
+                          <a:spcPct val="100000"/>
+                        </a:lnSpc>
+                        <a:spcBef>
+                          <a:spcPts val="0"/>
+                        </a:spcBef>
+                        <a:spcAft>
+                          <a:spcPts val="0"/>
+                        </a:spcAft>
+                        <a:buClrTx/>
+                        <a:buSzTx/>
+                        <a:buFont typeface="Arial" panose="020B0604020202020204" pitchFamily="34" charset="0"/>
+                        <a:buNone/>
+                        <a:tabLst/>
+                        <a:defRPr/>
+                      </a:pPr>
+                      <a:r>
+                        <a:rPr sz="1400" dirty="0" err="1"/>
+                        <a:t>ToolUniverse는</a:t>
+                      </a:r>
+                      <a:r>
+                        <a:rPr sz="1400" dirty="0"/>
+                        <a:t> </a:t>
+                      </a:r>
+                      <a:r>
+                        <a:rPr sz="1400" dirty="0" err="1"/>
+                        <a:t>기권을</a:t>
+                      </a:r>
+                      <a:r>
+                        <a:rPr sz="1400" dirty="0"/>
+                        <a:t> </a:t>
+                      </a:r>
+                      <a:r>
+                        <a:rPr sz="1400" dirty="0" err="1"/>
+                        <a:t>오답으로</a:t>
+                      </a:r>
+                      <a:r>
+                        <a:rPr sz="1400" dirty="0"/>
+                        <a:t>, </a:t>
+                      </a:r>
+                      <a:r>
+                        <a:rPr sz="1400" dirty="0" err="1"/>
+                        <a:t>Medea와</a:t>
+                      </a:r>
+                      <a:r>
+                        <a:rPr sz="1400" dirty="0"/>
+                        <a:t> </a:t>
+                      </a:r>
+                      <a:r>
+                        <a:rPr sz="1400" dirty="0" err="1"/>
+                        <a:t>BixBench는</a:t>
+                      </a:r>
+                      <a:r>
+                        <a:rPr sz="1400" dirty="0"/>
+                        <a:t> </a:t>
+                      </a:r>
+                      <a:r>
+                        <a:rPr lang="ko-KR" altLang="en-US" sz="1400" dirty="0"/>
+                        <a:t>기권한 문항을 빼고 나머지로 </a:t>
+                      </a:r>
+                      <a:r>
+                        <a:rPr lang="ko-KR" altLang="en-US" sz="1400" dirty="0" err="1"/>
+                        <a:t>정답률을</a:t>
+                      </a:r>
+                      <a:r>
+                        <a:rPr lang="ko-KR" altLang="en-US" sz="1400" dirty="0"/>
+                        <a:t> 계산합니다</a:t>
+                      </a:r>
+                      <a:r>
+                        <a:rPr lang="en-US" altLang="ko-KR" sz="1400" dirty="0"/>
+                        <a:t>. </a:t>
+                      </a:r>
+                      <a:r>
+                        <a:rPr sz="1400" dirty="0"/>
+                        <a:t>LAB-</a:t>
+                      </a:r>
+                      <a:r>
+                        <a:rPr sz="1400" dirty="0" err="1"/>
+                        <a:t>Bench는</a:t>
+                      </a:r>
+                      <a:r>
+                        <a:rPr lang="ko-KR" altLang="en-US" sz="1400" dirty="0"/>
+                        <a:t> 두 방식 모두 </a:t>
+                      </a:r>
+                      <a:r>
+                        <a:rPr sz="1400" dirty="0" err="1"/>
+                        <a:t>보고합니다</a:t>
+                      </a:r>
+                      <a:endParaRPr sz="1400" dirty="0"/>
+                    </a:p>
+                  </a:txBody>
+                  <a:tcPr/>
+                </a:tc>
+                <a:extLst>
+                  <a:ext uri="{0D108BD9-81ED-4DB2-BD59-A6C34878D82A}">
+                    <a16:rowId xmlns:a16="http://schemas.microsoft.com/office/drawing/2014/main" val="10003"/>
+                  </a:ext>
+                </a:extLst>
+              </a:tr>
+              <a:tr h="0">
+                <a:tc>
+                  <a:txBody>
+                    <a:bodyPr/>
+                    <a:lstStyle/>
+                    <a:p>
+                      <a:pPr marL="0" lvl="0" indent="0">
+                        <a:buNone/>
+                      </a:pPr>
+                      <a:r>
+                        <a:rPr sz="1400"/>
+                        <a:t>BixBench (MCQ)</a:t>
+                      </a:r>
+                    </a:p>
+                  </a:txBody>
+                  <a:tcPr/>
+                </a:tc>
+                <a:tc>
+                  <a:txBody>
+                    <a:bodyPr/>
+                    <a:lstStyle/>
+                    <a:p>
+                      <a:pPr marL="0" marR="0" lvl="0" indent="0" algn="l" defTabSz="914400" rtl="0" eaLnBrk="1" fontAlgn="auto" latinLnBrk="0" hangingPunct="1">
+                        <a:lnSpc>
+                          <a:spcPct val="100000"/>
+                        </a:lnSpc>
+                        <a:spcBef>
+                          <a:spcPts val="0"/>
+                        </a:spcBef>
+                        <a:spcAft>
+                          <a:spcPts val="0"/>
+                        </a:spcAft>
+                        <a:buClrTx/>
+                        <a:buSzTx/>
+                        <a:buFontTx/>
+                        <a:buNone/>
+                        <a:tabLst/>
+                        <a:defRPr/>
+                      </a:pPr>
+                      <a:r>
+                        <a:rPr lang="en-US" sz="1400" dirty="0" err="1"/>
+                        <a:t>BixBench</a:t>
+                      </a:r>
+                      <a:r>
+                        <a:rPr lang="ko-KR" altLang="en-US" sz="1400" dirty="0"/>
+                        <a:t>는 컴퓨터 생물학 분석 과제로 </a:t>
+                      </a:r>
+                      <a:r>
+                        <a:rPr lang="en-US" sz="1400" dirty="0"/>
+                        <a:t>LLM </a:t>
+                      </a:r>
+                      <a:r>
+                        <a:rPr lang="ko-KR" altLang="en-US" sz="1400" dirty="0"/>
+                        <a:t>에이전트를 시험하는 벤치마크입니다</a:t>
+                      </a:r>
+                      <a:r>
+                        <a:rPr lang="en-US" altLang="ko-KR" sz="1400" dirty="0"/>
+                        <a:t>. </a:t>
+                      </a:r>
+                      <a:r>
+                        <a:rPr lang="ko-KR" altLang="en-US" sz="1400" dirty="0"/>
+                        <a:t>객관식 문항에 “정보가 부족하다” 보기를 넣은 조건과 뺀 조건을 비교했습니다</a:t>
+                      </a:r>
+                      <a:r>
+                        <a:rPr lang="en-US" altLang="ko-KR" sz="1400" dirty="0"/>
+                        <a:t>.</a:t>
+                      </a:r>
+                    </a:p>
+                    <a:p>
+                      <a:pPr marL="0" lvl="0" indent="0">
+                        <a:buNone/>
+                      </a:pPr>
+                      <a:r>
+                        <a:rPr sz="1400" dirty="0" err="1"/>
+                        <a:t>기권</a:t>
+                      </a:r>
+                      <a:r>
+                        <a:rPr sz="1400" dirty="0"/>
+                        <a:t> </a:t>
+                      </a:r>
+                      <a:r>
+                        <a:rPr sz="1400" dirty="0" err="1"/>
+                        <a:t>보기를</a:t>
+                      </a:r>
+                      <a:r>
+                        <a:rPr sz="1400" dirty="0"/>
+                        <a:t> </a:t>
+                      </a:r>
+                      <a:r>
+                        <a:rPr sz="1400" dirty="0" err="1"/>
+                        <a:t>주면</a:t>
+                      </a:r>
+                      <a:r>
+                        <a:rPr sz="1400" dirty="0"/>
+                        <a:t> </a:t>
+                      </a:r>
+                      <a:r>
+                        <a:rPr sz="1400" dirty="0" err="1"/>
+                        <a:t>성능이</a:t>
+                      </a:r>
+                      <a:r>
+                        <a:rPr sz="1400" dirty="0"/>
+                        <a:t> </a:t>
+                      </a:r>
+                      <a:r>
+                        <a:rPr sz="1400" dirty="0" err="1"/>
+                        <a:t>random에</a:t>
+                      </a:r>
+                      <a:r>
+                        <a:rPr sz="1400" dirty="0"/>
+                        <a:t> </a:t>
+                      </a:r>
+                      <a:r>
+                        <a:rPr sz="1400" dirty="0" err="1"/>
+                        <a:t>가까워지고</a:t>
+                      </a:r>
+                      <a:r>
+                        <a:rPr sz="1400" dirty="0"/>
+                        <a:t>, </a:t>
+                      </a:r>
+                      <a:r>
+                        <a:rPr sz="1400" dirty="0" err="1"/>
+                        <a:t>빼면</a:t>
+                      </a:r>
+                      <a:r>
+                        <a:rPr sz="1400" dirty="0"/>
+                        <a:t> </a:t>
+                      </a:r>
+                      <a:r>
+                        <a:rPr sz="1400" dirty="0" err="1"/>
+                        <a:t>random보다</a:t>
+                      </a:r>
+                      <a:r>
+                        <a:rPr sz="1400" dirty="0"/>
+                        <a:t> </a:t>
+                      </a:r>
+                      <a:r>
+                        <a:rPr sz="1400" dirty="0" err="1"/>
+                        <a:t>높아집니다</a:t>
+                      </a:r>
+                      <a:endParaRPr sz="1400" dirty="0"/>
+                    </a:p>
+                  </a:txBody>
+                  <a:tcPr/>
+                </a:tc>
+                <a:extLst>
+                  <a:ext uri="{0D108BD9-81ED-4DB2-BD59-A6C34878D82A}">
+                    <a16:rowId xmlns:a16="http://schemas.microsoft.com/office/drawing/2014/main" val="10004"/>
+                  </a:ext>
+                </a:extLst>
+              </a:tr>
+            </a:tbl>
+          </a:graphicData>
+        </a:graphic>
+      </p:graphicFrame>
+    </p:spTree>
+  </p:cSld>
+  <p:clrMapOvr>
+    <a:masterClrMapping/>
+  </p:clrMapOvr>
+</p:sld>
+</file>
+
+<file path=ppt/slides/slide11.xml><?xml version="1.0" encoding="utf-8"?>
+<p:sld xmlns:a="http://schemas.openxmlformats.org/drawingml/2006/main" xmlns:r="http://schemas.openxmlformats.org/officeDocument/2006/relationships" xmlns:p="http://schemas.openxmlformats.org/presentationml/2006/main">
+  <p:cSld>
+    <p:spTree>
+      <p:nvGrpSpPr>
+        <p:cNvPr id="1" name=""/>
+        <p:cNvGrpSpPr/>
+        <p:nvPr/>
+      </p:nvGrpSpPr>
+      <p:grpSpPr>
+        <a:xfrm>
+          <a:off x="0" y="0"/>
+          <a:ext cx="0" cy="0"/>
+          <a:chOff x="0" y="0"/>
+          <a:chExt cx="0" cy="0"/>
+        </a:xfrm>
+      </p:grpSpPr>
+      <p:sp>
+        <p:nvSpPr>
+          <p:cNvPr id="2" name="Title 1">
+            <a:extLst>
+              <a:ext uri="{FF2B5EF4-FFF2-40B4-BE49-F238E27FC236}">
+                <a16:creationId xmlns:a16="http://schemas.microsoft.com/office/drawing/2014/main" id="{60DC0D0C-9A5E-1DC8-B48D-462EC113779B}"/>
+              </a:ext>
+            </a:extLst>
+          </p:cNvPr>
+          <p:cNvSpPr>
+            <a:spLocks noGrp="1"/>
+          </p:cNvSpPr>
+          <p:nvPr>
+            <p:ph type="title"/>
+          </p:nvPr>
+        </p:nvSpPr>
+        <p:spPr>
+          <a:xfrm>
+            <a:off x="831850" y="1709738"/>
+            <a:ext cx="10515600" cy="2852737"/>
+          </a:xfrm>
+        </p:spPr>
+        <p:txBody>
+          <a:bodyPr/>
+          <a:lstStyle/>
+          <a:p>
+            <a:pPr marL="0" lvl="0" indent="0">
+              <a:buNone/>
+            </a:pPr>
+            <a:r>
+              <a:t>난이도 정의</a:t>
+            </a:r>
+          </a:p>
+        </p:txBody>
+      </p:sp>
+    </p:spTree>
+  </p:cSld>
+  <p:clrMapOvr>
+    <a:masterClrMapping/>
+  </p:clrMapOvr>
+</p:sld>
+</file>
+
+<file path=ppt/slides/slide12.xml><?xml version="1.0" encoding="utf-8"?>
+<p:sld xmlns:a="http://schemas.openxmlformats.org/drawingml/2006/main" xmlns:r="http://schemas.openxmlformats.org/officeDocument/2006/relationships" xmlns:p="http://schemas.openxmlformats.org/presentationml/2006/main">
+  <p:cSld>
+    <p:spTree>
+      <p:nvGrpSpPr>
+        <p:cNvPr id="1" name=""/>
+        <p:cNvGrpSpPr/>
+        <p:nvPr/>
+      </p:nvGrpSpPr>
+      <p:grpSpPr>
+        <a:xfrm>
+          <a:off x="0" y="0"/>
+          <a:ext cx="0" cy="0"/>
+          <a:chOff x="0" y="0"/>
+          <a:chExt cx="0" cy="0"/>
+        </a:xfrm>
+      </p:grpSpPr>
+      <p:pic>
+        <p:nvPicPr>
+          <p:cNvPr id="5" name="Content Placeholder 4">
+            <a:extLst>
+              <a:ext uri="{FF2B5EF4-FFF2-40B4-BE49-F238E27FC236}">
+                <a16:creationId xmlns:a16="http://schemas.microsoft.com/office/drawing/2014/main" id="{83506041-357A-9496-FE18-03ADE6749FAB}"/>
+              </a:ext>
+            </a:extLst>
+          </p:cNvPr>
+          <p:cNvPicPr>
+            <a:picLocks noGrp="1" noChangeAspect="1"/>
+          </p:cNvPicPr>
+          <p:nvPr>
+            <p:ph idx="1"/>
+          </p:nvPr>
+        </p:nvPicPr>
+        <p:blipFill>
+          <a:blip r:embed="rId2"/>
+          <a:stretch>
+            <a:fillRect/>
+          </a:stretch>
+        </p:blipFill>
+        <p:spPr>
+          <a:xfrm>
+            <a:off x="693293" y="711221"/>
+            <a:ext cx="11058954" cy="5435558"/>
+          </a:xfrm>
+          <a:prstGeom prst="rect">
+            <a:avLst/>
+          </a:prstGeom>
+        </p:spPr>
+      </p:pic>
+    </p:spTree>
+  </p:cSld>
+  <p:clrMapOvr>
+    <a:masterClrMapping/>
+  </p:clrMapOvr>
+</p:sld>
+</file>
+
+<file path=ppt/slides/slide13.xml><?xml version="1.0" encoding="utf-8"?>
+<p:sld xmlns:a="http://schemas.openxmlformats.org/drawingml/2006/main" xmlns:r="http://schemas.openxmlformats.org/officeDocument/2006/relationships" xmlns:p="http://schemas.openxmlformats.org/presentationml/2006/main">
+  <p:cSld>
+    <p:spTree>
+      <p:nvGrpSpPr>
+        <p:cNvPr id="1" name=""/>
+        <p:cNvGrpSpPr/>
+        <p:nvPr/>
+      </p:nvGrpSpPr>
+      <p:grpSpPr>
+        <a:xfrm>
+          <a:off x="0" y="0"/>
+          <a:ext cx="0" cy="0"/>
+          <a:chOff x="0" y="0"/>
+          <a:chExt cx="0" cy="0"/>
+        </a:xfrm>
+      </p:grpSpPr>
+      <p:sp>
+        <p:nvSpPr>
+          <p:cNvPr id="2" name="Title 1">
+            <a:extLst>
+              <a:ext uri="{FF2B5EF4-FFF2-40B4-BE49-F238E27FC236}">
+                <a16:creationId xmlns:a16="http://schemas.microsoft.com/office/drawing/2014/main" id="{60DC0D0C-9A5E-1DC8-B48D-462EC113779B}"/>
+              </a:ext>
+            </a:extLst>
+          </p:cNvPr>
+          <p:cNvSpPr>
+            <a:spLocks noGrp="1"/>
+          </p:cNvSpPr>
+          <p:nvPr>
+            <p:ph type="title"/>
+          </p:nvPr>
+        </p:nvSpPr>
+        <p:spPr>
+          <a:xfrm>
+            <a:off x="831850" y="1709738"/>
+            <a:ext cx="10515600" cy="2852737"/>
+          </a:xfrm>
+        </p:spPr>
+        <p:txBody>
+          <a:bodyPr/>
+          <a:lstStyle/>
+          <a:p>
+            <a:pPr marL="0" lvl="0" indent="0">
+              <a:buNone/>
+            </a:pPr>
+            <a:r>
+              <a:t>INPUT &amp; OUTPUT</a:t>
+            </a:r>
+          </a:p>
+        </p:txBody>
+      </p:sp>
+    </p:spTree>
+  </p:cSld>
+  <p:clrMapOvr>
+    <a:masterClrMapping/>
+  </p:clrMapOvr>
+</p:sld>
+</file>
+
+<file path=ppt/slides/slide14.xml><?xml version="1.0" encoding="utf-8"?>
+<p:sld xmlns:a="http://schemas.openxmlformats.org/drawingml/2006/main" xmlns:r="http://schemas.openxmlformats.org/officeDocument/2006/relationships" xmlns:p="http://schemas.openxmlformats.org/presentationml/2006/main">
+  <p:cSld>
+    <p:spTree>
+      <p:nvGrpSpPr>
+        <p:cNvPr id="1" name=""/>
+        <p:cNvGrpSpPr/>
+        <p:nvPr/>
+      </p:nvGrpSpPr>
+      <p:grpSpPr>
+        <a:xfrm>
+          <a:off x="0" y="0"/>
+          <a:ext cx="0" cy="0"/>
+          <a:chOff x="0" y="0"/>
+          <a:chExt cx="0" cy="0"/>
+        </a:xfrm>
+      </p:grpSpPr>
+      <p:sp>
+        <p:nvSpPr>
+          <p:cNvPr id="2" name="Title 1">
+            <a:extLst>
+              <a:ext uri="{FF2B5EF4-FFF2-40B4-BE49-F238E27FC236}">
+                <a16:creationId xmlns:a16="http://schemas.microsoft.com/office/drawing/2014/main" id="{C9CE818D-09AE-4CD2-3C65-237AD773CD9F}"/>
+              </a:ext>
+            </a:extLst>
+          </p:cNvPr>
+          <p:cNvSpPr>
+            <a:spLocks noGrp="1"/>
+          </p:cNvSpPr>
+          <p:nvPr>
+            <p:ph type="title"/>
+          </p:nvPr>
+        </p:nvSpPr>
+        <p:spPr/>
+        <p:txBody>
+          <a:bodyPr/>
+          <a:lstStyle/>
+          <a:p>
+            <a:pPr marL="0" lvl="0" indent="0">
+              <a:buNone/>
+            </a:pPr>
+            <a:r>
+              <a:t>모든 조건 공통</a:t>
+            </a:r>
+          </a:p>
+        </p:txBody>
+      </p:sp>
+      <p:graphicFrame>
+        <p:nvGraphicFramePr>
+          <p:cNvPr id="6" name="Content Placeholder 5"/>
+          <p:cNvGraphicFramePr>
+            <a:graphicFrameLocks noGrp="1"/>
+          </p:cNvGraphicFramePr>
+          <p:nvPr>
+            <p:ph idx="1"/>
+            <p:extLst>
+              <p:ext uri="{D42A27DB-BD31-4B8C-83A1-F6EECF244321}">
+                <p14:modId xmlns:p14="http://schemas.microsoft.com/office/powerpoint/2010/main" val="1792302601"/>
+              </p:ext>
+            </p:extLst>
+          </p:nvPr>
+        </p:nvGraphicFramePr>
+        <p:xfrm>
+          <a:off x="838200" y="1816100"/>
+          <a:ext cx="10515600" cy="2926080"/>
+        </p:xfrm>
+        <a:graphic>
+          <a:graphicData uri="http://schemas.openxmlformats.org/drawingml/2006/table">
+            <a:tbl>
+              <a:tblPr firstRow="1" bandRow="1">
+                <a:tableStyleId>{5C22544A-7EE6-4342-B048-85BDC9FD1C3A}</a:tableStyleId>
+              </a:tblPr>
+              <a:tblGrid>
+                <a:gridCol w="1756719">
+                  <a:extLst>
+                    <a:ext uri="{9D8B030D-6E8A-4147-A177-3AD203B41FA5}">
+                      <a16:colId xmlns:a16="http://schemas.microsoft.com/office/drawing/2014/main" val="20000"/>
+                    </a:ext>
+                  </a:extLst>
+                </a:gridCol>
+                <a:gridCol w="8758881">
+                  <a:extLst>
+                    <a:ext uri="{9D8B030D-6E8A-4147-A177-3AD203B41FA5}">
+                      <a16:colId xmlns:a16="http://schemas.microsoft.com/office/drawing/2014/main" val="20001"/>
+                    </a:ext>
+                  </a:extLst>
+                </a:gridCol>
+              </a:tblGrid>
+              <a:tr h="0">
+                <a:tc>
+                  <a:txBody>
+                    <a:bodyPr/>
+                    <a:lstStyle/>
+                    <a:p>
+                      <a:pPr marL="0" lvl="0" indent="0">
+                        <a:buNone/>
+                      </a:pPr>
+                      <a:r>
+                        <a:t>항목</a:t>
+                      </a:r>
+                    </a:p>
+                  </a:txBody>
+                  <a:tcPr/>
+                </a:tc>
+                <a:tc>
+                  <a:txBody>
+                    <a:bodyPr/>
+                    <a:lstStyle/>
+                    <a:p>
+                      <a:pPr marL="0" lvl="0" indent="0">
+                        <a:buNone/>
+                      </a:pPr>
+                      <a:r>
+                        <a:t>정의</a:t>
+                      </a:r>
+                    </a:p>
+                  </a:txBody>
+                  <a:tcPr/>
+                </a:tc>
+                <a:extLst>
+                  <a:ext uri="{0D108BD9-81ED-4DB2-BD59-A6C34878D82A}">
+                    <a16:rowId xmlns:a16="http://schemas.microsoft.com/office/drawing/2014/main" val="10000"/>
+                  </a:ext>
+                </a:extLst>
+              </a:tr>
+              <a:tr h="0">
+                <a:tc>
+                  <a:txBody>
+                    <a:bodyPr/>
+                    <a:lstStyle/>
+                    <a:p>
+                      <a:pPr marL="0" lvl="0" indent="0">
+                        <a:buNone/>
+                      </a:pPr>
+                      <a:r>
+                        <a:t>입력</a:t>
+                      </a:r>
+                    </a:p>
+                  </a:txBody>
+                  <a:tcPr/>
+                </a:tc>
+                <a:tc>
+                  <a:txBody>
+                    <a:bodyPr/>
+                    <a:lstStyle/>
+                    <a:p>
+                      <a:pPr marL="0" lvl="0" indent="0">
+                        <a:buNone/>
+                      </a:pPr>
+                      <a:r>
+                        <a:t>단백질 서열 + 화합물 SMILES만. 타겟 식별자(UniProt ID 등)는 주지 않습니다</a:t>
+                      </a:r>
+                    </a:p>
+                  </a:txBody>
+                  <a:tcPr/>
+                </a:tc>
+                <a:extLst>
+                  <a:ext uri="{0D108BD9-81ED-4DB2-BD59-A6C34878D82A}">
+                    <a16:rowId xmlns:a16="http://schemas.microsoft.com/office/drawing/2014/main" val="10001"/>
+                  </a:ext>
+                </a:extLst>
+              </a:tr>
+              <a:tr h="0">
+                <a:tc>
+                  <a:txBody>
+                    <a:bodyPr/>
+                    <a:lstStyle/>
+                    <a:p>
+                      <a:pPr marL="0" lvl="0" indent="0">
+                        <a:buNone/>
+                      </a:pPr>
+                      <a:r>
+                        <a:t>주 결정</a:t>
+                      </a:r>
+                    </a:p>
+                  </a:txBody>
+                  <a:tcPr/>
+                </a:tc>
+                <a:tc>
+                  <a:txBody>
+                    <a:bodyPr/>
+                    <a:lstStyle/>
+                    <a:p>
+                      <a:pPr marL="0" lvl="0" indent="0">
+                        <a:buNone/>
+                      </a:pPr>
+                      <a:r>
+                        <a:t>결합 여부 </a:t>
+                      </a:r>
+                      <a:r>
+                        <a:rPr>
+                          <a:latin typeface="Courier"/>
+                        </a:rPr>
+                        <a:t>binds</a:t>
+                      </a:r>
+                      <a:r>
+                        <a:t>. pAffinity ≥ 6.0 (Kd / Ki / IC50 ≤ 1 µM)이면 true</a:t>
+                      </a:r>
+                    </a:p>
+                  </a:txBody>
+                  <a:tcPr/>
+                </a:tc>
+                <a:extLst>
+                  <a:ext uri="{0D108BD9-81ED-4DB2-BD59-A6C34878D82A}">
+                    <a16:rowId xmlns:a16="http://schemas.microsoft.com/office/drawing/2014/main" val="10002"/>
+                  </a:ext>
+                </a:extLst>
+              </a:tr>
+              <a:tr h="0">
+                <a:tc>
+                  <a:txBody>
+                    <a:bodyPr/>
+                    <a:lstStyle/>
+                    <a:p>
+                      <a:pPr marL="0" lvl="0" indent="0">
+                        <a:buNone/>
+                      </a:pPr>
+                      <a:r>
+                        <a:t>출력</a:t>
+                      </a:r>
+                    </a:p>
+                  </a:txBody>
+                  <a:tcPr/>
+                </a:tc>
+                <a:tc>
+                  <a:txBody>
+                    <a:bodyPr/>
+                    <a:lstStyle/>
+                    <a:p>
+                      <a:pPr marL="0" lvl="0" indent="0">
+                        <a:buNone/>
+                      </a:pPr>
+                      <a:r>
+                        <a:rPr>
+                          <a:latin typeface="Courier"/>
+                        </a:rPr>
+                        <a:t>binds</a:t>
+                      </a:r>
+                      <a:r>
+                        <a:t>와 신뢰도, 또는 기권</a:t>
+                      </a:r>
+                    </a:p>
+                  </a:txBody>
+                  <a:tcPr/>
+                </a:tc>
+                <a:extLst>
+                  <a:ext uri="{0D108BD9-81ED-4DB2-BD59-A6C34878D82A}">
+                    <a16:rowId xmlns:a16="http://schemas.microsoft.com/office/drawing/2014/main" val="10003"/>
+                  </a:ext>
+                </a:extLst>
+              </a:tr>
+              <a:tr h="0">
+                <a:tc>
+                  <a:txBody>
+                    <a:bodyPr/>
+                    <a:lstStyle/>
+                    <a:p>
+                      <a:pPr marL="0" lvl="0" indent="0">
+                        <a:buNone/>
+                      </a:pPr>
+                      <a:r>
+                        <a:t>주 지표</a:t>
+                      </a:r>
+                    </a:p>
+                  </a:txBody>
+                  <a:tcPr/>
+                </a:tc>
+                <a:tc>
+                  <a:txBody>
+                    <a:bodyPr/>
+                    <a:lstStyle/>
+                    <a:p>
+                      <a:pPr marL="0" lvl="0" indent="0">
+                        <a:buNone/>
+                      </a:pPr>
+                      <a:r>
+                        <a:rPr dirty="0"/>
+                        <a:t>AURC, coverage 80%에서의 selective accuracy</a:t>
+                      </a:r>
+                    </a:p>
+                  </a:txBody>
+                  <a:tcPr/>
+                </a:tc>
+                <a:extLst>
+                  <a:ext uri="{0D108BD9-81ED-4DB2-BD59-A6C34878D82A}">
+                    <a16:rowId xmlns:a16="http://schemas.microsoft.com/office/drawing/2014/main" val="10004"/>
+                  </a:ext>
+                </a:extLst>
+              </a:tr>
+              <a:tr h="0">
+                <a:tc>
+                  <a:txBody>
+                    <a:bodyPr/>
+                    <a:lstStyle/>
+                    <a:p>
+                      <a:pPr marL="0" lvl="0" indent="0">
+                        <a:buNone/>
+                      </a:pPr>
+                      <a:r>
+                        <a:t>보조</a:t>
+                      </a:r>
+                    </a:p>
+                  </a:txBody>
+                  <a:tcPr/>
+                </a:tc>
+                <a:tc>
+                  <a:txBody>
+                    <a:bodyPr/>
+                    <a:lstStyle/>
+                    <a:p>
+                      <a:pPr marL="0" lvl="0" indent="0">
+                        <a:buNone/>
+                      </a:pPr>
+                      <a:r>
+                        <a:t>회귀(pAffinity). Ki와 Kd 정확값 부분집합에서만 보고</a:t>
+                      </a:r>
+                    </a:p>
+                  </a:txBody>
+                  <a:tcPr/>
+                </a:tc>
+                <a:extLst>
+                  <a:ext uri="{0D108BD9-81ED-4DB2-BD59-A6C34878D82A}">
+                    <a16:rowId xmlns:a16="http://schemas.microsoft.com/office/drawing/2014/main" val="10005"/>
+                  </a:ext>
+                </a:extLst>
+              </a:tr>
+              <a:tr h="0">
+                <a:tc>
+                  <a:txBody>
+                    <a:bodyPr/>
+                    <a:lstStyle/>
+                    <a:p>
+                      <a:pPr marL="0" lvl="0" indent="0">
+                        <a:buNone/>
+                      </a:pPr>
+                      <a:r>
+                        <a:t>데이터</a:t>
+                      </a:r>
+                    </a:p>
+                  </a:txBody>
+                  <a:tcPr/>
+                </a:tc>
+                <a:tc>
+                  <a:txBody>
+                    <a:bodyPr/>
+                    <a:lstStyle/>
+                    <a:p>
+                      <a:pPr marL="0" lvl="0" indent="0">
+                        <a:buNone/>
+                      </a:pPr>
+                      <a:r>
+                        <a:t>BindingDB </a:t>
+                      </a:r>
+                      <a:r>
+                        <a:rPr>
+                          <a:latin typeface="Courier"/>
+                        </a:rPr>
+                        <a:t>202610</a:t>
+                      </a:r>
+                      <a:r>
+                        <a:t> 스냅샷의 CC BY 4.0 부분 (1,436,782행)</a:t>
+                      </a:r>
+                    </a:p>
+                  </a:txBody>
+                  <a:tcPr/>
+                </a:tc>
+                <a:extLst>
+                  <a:ext uri="{0D108BD9-81ED-4DB2-BD59-A6C34878D82A}">
+                    <a16:rowId xmlns:a16="http://schemas.microsoft.com/office/drawing/2014/main" val="10006"/>
+                  </a:ext>
+                </a:extLst>
+              </a:tr>
+              <a:tr h="0">
+                <a:tc>
+                  <a:txBody>
+                    <a:bodyPr/>
+                    <a:lstStyle/>
+                    <a:p>
+                      <a:pPr marL="0" lvl="0" indent="0">
+                        <a:buNone/>
+                      </a:pPr>
+                      <a:r>
+                        <a:t>음성</a:t>
+                      </a:r>
+                    </a:p>
+                  </a:txBody>
+                  <a:tcPr/>
+                </a:tc>
+                <a:tc>
+                  <a:txBody>
+                    <a:bodyPr/>
+                    <a:lstStyle/>
+                    <a:p>
+                      <a:pPr marL="0" lvl="0" indent="0">
+                        <a:buNone/>
+                      </a:pPr>
+                      <a:r>
+                        <a:rPr dirty="0" err="1"/>
+                        <a:t>검열값</a:t>
+                      </a:r>
+                      <a:r>
+                        <a:rPr dirty="0"/>
+                        <a:t> </a:t>
+                      </a:r>
+                      <a:r>
+                        <a:rPr dirty="0">
+                          <a:latin typeface="Courier"/>
+                        </a:rPr>
+                        <a:t>&gt;10 µM</a:t>
+                      </a:r>
+                      <a:r>
+                        <a:rPr dirty="0"/>
+                        <a:t> + </a:t>
+                      </a:r>
+                      <a:r>
+                        <a:rPr dirty="0" err="1"/>
+                        <a:t>측정된</a:t>
+                      </a:r>
+                      <a:r>
+                        <a:rPr dirty="0"/>
+                        <a:t> </a:t>
+                      </a:r>
+                      <a:r>
+                        <a:rPr dirty="0" err="1"/>
+                        <a:t>약한</a:t>
+                      </a:r>
+                      <a:r>
+                        <a:rPr dirty="0"/>
+                        <a:t> </a:t>
+                      </a:r>
+                      <a:r>
+                        <a:rPr dirty="0" err="1"/>
+                        <a:t>결합</a:t>
+                      </a:r>
+                      <a:r>
+                        <a:rPr dirty="0"/>
+                        <a:t> (</a:t>
+                      </a:r>
+                      <a:r>
+                        <a:rPr dirty="0" err="1"/>
+                        <a:t>pAffinity</a:t>
+                      </a:r>
+                      <a:r>
+                        <a:rPr dirty="0"/>
+                        <a:t> &lt; 6). decoy </a:t>
+                      </a:r>
+                      <a:r>
+                        <a:rPr dirty="0" err="1"/>
+                        <a:t>합성은</a:t>
+                      </a:r>
+                      <a:r>
+                        <a:rPr dirty="0"/>
+                        <a:t> </a:t>
+                      </a:r>
+                      <a:r>
+                        <a:rPr dirty="0" err="1"/>
+                        <a:t>쓰지</a:t>
+                      </a:r>
+                      <a:r>
+                        <a:rPr dirty="0"/>
+                        <a:t> </a:t>
+                      </a:r>
+                      <a:r>
+                        <a:rPr dirty="0" err="1"/>
+                        <a:t>않습니다</a:t>
+                      </a:r>
+                      <a:endParaRPr dirty="0"/>
+                    </a:p>
+                  </a:txBody>
+                  <a:tcPr/>
+                </a:tc>
+                <a:extLst>
+                  <a:ext uri="{0D108BD9-81ED-4DB2-BD59-A6C34878D82A}">
+                    <a16:rowId xmlns:a16="http://schemas.microsoft.com/office/drawing/2014/main" val="10007"/>
+                  </a:ext>
+                </a:extLst>
+              </a:tr>
+            </a:tbl>
+          </a:graphicData>
+        </a:graphic>
+      </p:graphicFrame>
+    </p:spTree>
+  </p:cSld>
+  <p:clrMapOvr>
+    <a:masterClrMapping/>
+  </p:clrMapOvr>
+</p:sld>
+</file>
+
+<file path=ppt/slides/slide15.xml><?xml version="1.0" encoding="utf-8"?>
+<p:sld xmlns:a="http://schemas.openxmlformats.org/drawingml/2006/main" xmlns:r="http://schemas.openxmlformats.org/officeDocument/2006/relationships" xmlns:p="http://schemas.openxmlformats.org/presentationml/2006/main">
+  <p:cSld>
+    <p:spTree>
+      <p:nvGrpSpPr>
+        <p:cNvPr id="1" name=""/>
+        <p:cNvGrpSpPr/>
+        <p:nvPr/>
+      </p:nvGrpSpPr>
+      <p:grpSpPr>
+        <a:xfrm>
+          <a:off x="0" y="0"/>
+          <a:ext cx="0" cy="0"/>
+          <a:chOff x="0" y="0"/>
+          <a:chExt cx="0" cy="0"/>
+        </a:xfrm>
+      </p:grpSpPr>
+      <p:sp>
+        <p:nvSpPr>
+          <p:cNvPr id="2" name="Title 1">
+            <a:extLst>
+              <a:ext uri="{FF2B5EF4-FFF2-40B4-BE49-F238E27FC236}">
+                <a16:creationId xmlns:a16="http://schemas.microsoft.com/office/drawing/2014/main" id="{C9CE818D-09AE-4CD2-3C65-237AD773CD9F}"/>
+              </a:ext>
+            </a:extLst>
+          </p:cNvPr>
+          <p:cNvSpPr>
+            <a:spLocks noGrp="1"/>
+          </p:cNvSpPr>
+          <p:nvPr>
+            <p:ph type="title"/>
+          </p:nvPr>
+        </p:nvSpPr>
+        <p:spPr/>
+        <p:txBody>
+          <a:bodyPr/>
+          <a:lstStyle/>
+          <a:p>
+            <a:pPr marL="0" lvl="0" indent="0">
+              <a:buNone/>
+            </a:pPr>
+            <a:r>
+              <a:t>큐레이션 트랙</a:t>
+            </a:r>
+          </a:p>
+        </p:txBody>
+      </p:sp>
+      <p:graphicFrame>
+        <p:nvGraphicFramePr>
+          <p:cNvPr id="6" name="Content Placeholder 5"/>
+          <p:cNvGraphicFramePr>
+            <a:graphicFrameLocks noGrp="1"/>
+          </p:cNvGraphicFramePr>
+          <p:nvPr>
+            <p:ph idx="1"/>
+            <p:extLst>
+              <p:ext uri="{D42A27DB-BD31-4B8C-83A1-F6EECF244321}">
+                <p14:modId xmlns:p14="http://schemas.microsoft.com/office/powerpoint/2010/main" val="3032166293"/>
+              </p:ext>
+            </p:extLst>
+          </p:nvPr>
+        </p:nvGraphicFramePr>
+        <p:xfrm>
+          <a:off x="838200" y="1816100"/>
+          <a:ext cx="10515600" cy="2926080"/>
+        </p:xfrm>
+        <a:graphic>
+          <a:graphicData uri="http://schemas.openxmlformats.org/drawingml/2006/table">
+            <a:tbl>
+              <a:tblPr firstRow="1" bandRow="1">
+                <a:tableStyleId>{5C22544A-7EE6-4342-B048-85BDC9FD1C3A}</a:tableStyleId>
+              </a:tblPr>
+              <a:tblGrid>
+                <a:gridCol w="1682578">
+                  <a:extLst>
+                    <a:ext uri="{9D8B030D-6E8A-4147-A177-3AD203B41FA5}">
+                      <a16:colId xmlns:a16="http://schemas.microsoft.com/office/drawing/2014/main" val="20000"/>
+                    </a:ext>
+                  </a:extLst>
+                </a:gridCol>
+                <a:gridCol w="4547287">
+                  <a:extLst>
+                    <a:ext uri="{9D8B030D-6E8A-4147-A177-3AD203B41FA5}">
+                      <a16:colId xmlns:a16="http://schemas.microsoft.com/office/drawing/2014/main" val="20001"/>
+                    </a:ext>
+                  </a:extLst>
+                </a:gridCol>
+                <a:gridCol w="4285735">
+                  <a:extLst>
+                    <a:ext uri="{9D8B030D-6E8A-4147-A177-3AD203B41FA5}">
+                      <a16:colId xmlns:a16="http://schemas.microsoft.com/office/drawing/2014/main" val="20002"/>
+                    </a:ext>
+                  </a:extLst>
+                </a:gridCol>
+              </a:tblGrid>
+              <a:tr h="0">
+                <a:tc>
+                  <a:txBody>
+                    <a:bodyPr/>
+                    <a:lstStyle/>
+                    <a:p>
+                      <a:pPr marL="0" lvl="0" indent="0">
+                        <a:buNone/>
+                      </a:pPr>
+                      <a:r>
+                        <a:t>단계</a:t>
+                      </a:r>
+                    </a:p>
+                  </a:txBody>
+                  <a:tcPr/>
+                </a:tc>
+                <a:tc>
+                  <a:txBody>
+                    <a:bodyPr/>
+                    <a:lstStyle/>
+                    <a:p>
+                      <a:pPr marL="0" lvl="0" indent="0">
+                        <a:buNone/>
+                      </a:pPr>
+                      <a:r>
+                        <a:t>입력</a:t>
+                      </a:r>
+                    </a:p>
+                  </a:txBody>
+                  <a:tcPr/>
+                </a:tc>
+                <a:tc>
+                  <a:txBody>
+                    <a:bodyPr/>
+                    <a:lstStyle/>
+                    <a:p>
+                      <a:pPr marL="0" lvl="0" indent="0">
+                        <a:buNone/>
+                      </a:pPr>
+                      <a:r>
+                        <a:t>출력</a:t>
+                      </a:r>
+                    </a:p>
+                  </a:txBody>
+                  <a:tcPr/>
+                </a:tc>
+                <a:extLst>
+                  <a:ext uri="{0D108BD9-81ED-4DB2-BD59-A6C34878D82A}">
+                    <a16:rowId xmlns:a16="http://schemas.microsoft.com/office/drawing/2014/main" val="10000"/>
+                  </a:ext>
+                </a:extLst>
+              </a:tr>
+              <a:tr h="0">
+                <a:tc>
+                  <a:txBody>
+                    <a:bodyPr/>
+                    <a:lstStyle/>
+                    <a:p>
+                      <a:pPr marL="0" lvl="0" indent="0">
+                        <a:buNone/>
+                      </a:pPr>
+                      <a:r>
+                        <a:t>쿼리 선정</a:t>
+                      </a:r>
+                    </a:p>
+                  </a:txBody>
+                  <a:tcPr/>
+                </a:tc>
+                <a:tc>
+                  <a:txBody>
+                    <a:bodyPr/>
+                    <a:lstStyle/>
+                    <a:p>
+                      <a:pPr marL="0" lvl="0" indent="0">
+                        <a:buNone/>
+                      </a:pPr>
+                      <a:r>
+                        <a:t>BindingDB </a:t>
+                      </a:r>
+                      <a:r>
+                        <a:rPr>
+                          <a:latin typeface="Courier"/>
+                        </a:rPr>
+                        <a:t>202610</a:t>
+                      </a:r>
+                      <a:r>
+                        <a:t> CC BY 부분 (Articles + Patents)</a:t>
+                      </a:r>
+                    </a:p>
+                  </a:txBody>
+                  <a:tcPr/>
+                </a:tc>
+                <a:tc>
+                  <a:txBody>
+                    <a:bodyPr/>
+                    <a:lstStyle/>
+                    <a:p>
+                      <a:pPr marL="0" lvl="0" indent="0">
+                        <a:buNone/>
+                      </a:pPr>
+                      <a:r>
+                        <a:t>평가 쿼리 60-100개 (서열, SMILES, 정답 </a:t>
+                      </a:r>
+                      <a:r>
+                        <a:rPr>
+                          <a:latin typeface="Courier"/>
+                        </a:rPr>
+                        <a:t>binds</a:t>
+                      </a:r>
+                      <a:r>
+                        <a:t>, 측정 종류, 출처)</a:t>
+                      </a:r>
+                    </a:p>
+                  </a:txBody>
+                  <a:tcPr/>
+                </a:tc>
+                <a:extLst>
+                  <a:ext uri="{0D108BD9-81ED-4DB2-BD59-A6C34878D82A}">
+                    <a16:rowId xmlns:a16="http://schemas.microsoft.com/office/drawing/2014/main" val="10001"/>
+                  </a:ext>
+                </a:extLst>
+              </a:tr>
+              <a:tr h="0">
+                <a:tc>
+                  <a:txBody>
+                    <a:bodyPr/>
+                    <a:lstStyle/>
+                    <a:p>
+                      <a:pPr marL="0" lvl="0" indent="0">
+                        <a:buNone/>
+                      </a:pPr>
+                      <a:r>
+                        <a:t>포함 기준</a:t>
+                      </a:r>
+                    </a:p>
+                  </a:txBody>
+                  <a:tcPr/>
+                </a:tc>
+                <a:tc>
+                  <a:txBody>
+                    <a:bodyPr/>
+                    <a:lstStyle/>
+                    <a:p>
+                      <a:pPr marL="0" lvl="0" indent="0">
+                        <a:buNone/>
+                      </a:pPr>
+                      <a:r>
+                        <a:t>측정 메타데이터 (부등호, 반복 측정, 리간드 크기 등)</a:t>
+                      </a:r>
+                    </a:p>
+                  </a:txBody>
+                  <a:tcPr/>
+                </a:tc>
+                <a:tc>
+                  <a:txBody>
+                    <a:bodyPr/>
+                    <a:lstStyle/>
+                    <a:p>
+                      <a:pPr marL="0" lvl="0" indent="0">
+                        <a:buNone/>
+                      </a:pPr>
+                      <a:r>
+                        <a:t>제외 및 플래그 기록</a:t>
+                      </a:r>
+                    </a:p>
+                  </a:txBody>
+                  <a:tcPr/>
+                </a:tc>
+                <a:extLst>
+                  <a:ext uri="{0D108BD9-81ED-4DB2-BD59-A6C34878D82A}">
+                    <a16:rowId xmlns:a16="http://schemas.microsoft.com/office/drawing/2014/main" val="10002"/>
+                  </a:ext>
+                </a:extLst>
+              </a:tr>
+              <a:tr h="0">
+                <a:tc>
+                  <a:txBody>
+                    <a:bodyPr/>
+                    <a:lstStyle/>
+                    <a:p>
+                      <a:pPr marL="0" lvl="0" indent="0">
+                        <a:buNone/>
+                      </a:pPr>
+                      <a:r>
+                        <a:t>좌표 계산</a:t>
+                      </a:r>
+                    </a:p>
+                  </a:txBody>
+                  <a:tcPr/>
+                </a:tc>
+                <a:tc>
+                  <a:txBody>
+                    <a:bodyPr/>
+                    <a:lstStyle/>
+                    <a:p>
+                      <a:pPr marL="0" lvl="0" indent="0">
+                        <a:buNone/>
+                      </a:pPr>
+                      <a:r>
+                        <a:t>쿼리, A의 학습 split, Pharos, AlphaFold DB, PDB/SIFTS, 발행일</a:t>
+                      </a:r>
+                    </a:p>
+                  </a:txBody>
+                  <a:tcPr/>
+                </a:tc>
+                <a:tc>
+                  <a:txBody>
+                    <a:bodyPr/>
+                    <a:lstStyle/>
+                    <a:p>
+                      <a:pPr marL="0" lvl="0" indent="0">
+                        <a:buNone/>
+                      </a:pPr>
+                      <a:r>
+                        <a:t>쿼리별 난이도 좌표와 유효성 플래그</a:t>
+                      </a:r>
+                    </a:p>
+                  </a:txBody>
+                  <a:tcPr/>
+                </a:tc>
+                <a:extLst>
+                  <a:ext uri="{0D108BD9-81ED-4DB2-BD59-A6C34878D82A}">
+                    <a16:rowId xmlns:a16="http://schemas.microsoft.com/office/drawing/2014/main" val="10003"/>
+                  </a:ext>
+                </a:extLst>
+              </a:tr>
+              <a:tr h="0">
+                <a:tc>
+                  <a:txBody>
+                    <a:bodyPr/>
+                    <a:lstStyle/>
+                    <a:p>
+                      <a:pPr marL="0" lvl="0" indent="0">
+                        <a:buNone/>
+                      </a:pPr>
+                      <a:r>
+                        <a:t>교차 검증</a:t>
+                      </a:r>
+                    </a:p>
+                  </a:txBody>
+                  <a:tcPr/>
+                </a:tc>
+                <a:tc>
+                  <a:txBody>
+                    <a:bodyPr/>
+                    <a:lstStyle/>
+                    <a:p>
+                      <a:pPr marL="0" lvl="0" indent="0">
+                        <a:buNone/>
+                      </a:pPr>
+                      <a:r>
+                        <a:t>쿼리 초안</a:t>
+                      </a:r>
+                    </a:p>
+                  </a:txBody>
+                  <a:tcPr/>
+                </a:tc>
+                <a:tc>
+                  <a:txBody>
+                    <a:bodyPr/>
+                    <a:lstStyle/>
+                    <a:p>
+                      <a:pPr marL="0" lvl="0" indent="0">
+                        <a:buNone/>
+                      </a:pPr>
+                      <a:r>
+                        <a:rPr dirty="0"/>
+                        <a:t>2인 </a:t>
+                      </a:r>
+                      <a:r>
+                        <a:rPr dirty="0" err="1"/>
+                        <a:t>검증</a:t>
+                      </a:r>
+                      <a:r>
+                        <a:rPr dirty="0"/>
+                        <a:t> </a:t>
+                      </a:r>
+                      <a:r>
+                        <a:rPr dirty="0" err="1"/>
+                        <a:t>기록</a:t>
+                      </a:r>
+                      <a:r>
+                        <a:rPr dirty="0"/>
+                        <a:t>, </a:t>
+                      </a:r>
+                      <a:r>
+                        <a:rPr dirty="0">
+                          <a:latin typeface="Courier"/>
+                        </a:rPr>
+                        <a:t>results/benchmark/</a:t>
+                      </a:r>
+                      <a:r>
+                        <a:rPr dirty="0"/>
+                        <a:t> </a:t>
+                      </a:r>
+                      <a:r>
+                        <a:rPr dirty="0" err="1"/>
+                        <a:t>확정본</a:t>
+                      </a:r>
+                      <a:endParaRPr dirty="0"/>
+                    </a:p>
+                  </a:txBody>
+                  <a:tcPr/>
+                </a:tc>
+                <a:extLst>
+                  <a:ext uri="{0D108BD9-81ED-4DB2-BD59-A6C34878D82A}">
+                    <a16:rowId xmlns:a16="http://schemas.microsoft.com/office/drawing/2014/main" val="10004"/>
+                  </a:ext>
+                </a:extLst>
+              </a:tr>
+            </a:tbl>
+          </a:graphicData>
+        </a:graphic>
+      </p:graphicFrame>
+    </p:spTree>
+  </p:cSld>
+  <p:clrMapOvr>
+    <a:masterClrMapping/>
+  </p:clrMapOvr>
+</p:sld>
+</file>
+
+<file path=ppt/slides/slide16.xml><?xml version="1.0" encoding="utf-8"?>
+<p:sld xmlns:a="http://schemas.openxmlformats.org/drawingml/2006/main" xmlns:r="http://schemas.openxmlformats.org/officeDocument/2006/relationships" xmlns:p="http://schemas.openxmlformats.org/presentationml/2006/main">
+  <p:cSld>
+    <p:spTree>
+      <p:nvGrpSpPr>
+        <p:cNvPr id="1" name=""/>
+        <p:cNvGrpSpPr/>
+        <p:nvPr/>
+      </p:nvGrpSpPr>
+      <p:grpSpPr>
+        <a:xfrm>
+          <a:off x="0" y="0"/>
+          <a:ext cx="0" cy="0"/>
+          <a:chOff x="0" y="0"/>
+          <a:chExt cx="0" cy="0"/>
+        </a:xfrm>
+      </p:grpSpPr>
+      <p:sp>
+        <p:nvSpPr>
+          <p:cNvPr id="2" name="Title 1">
+            <a:extLst>
+              <a:ext uri="{FF2B5EF4-FFF2-40B4-BE49-F238E27FC236}">
+                <a16:creationId xmlns:a16="http://schemas.microsoft.com/office/drawing/2014/main" id="{C9CE818D-09AE-4CD2-3C65-237AD773CD9F}"/>
+              </a:ext>
+            </a:extLst>
+          </p:cNvPr>
+          <p:cNvSpPr>
+            <a:spLocks noGrp="1"/>
+          </p:cNvSpPr>
+          <p:nvPr>
+            <p:ph type="title"/>
+          </p:nvPr>
+        </p:nvSpPr>
+        <p:spPr/>
+        <p:txBody>
+          <a:bodyPr/>
+          <a:lstStyle/>
+          <a:p>
+            <a:pPr marL="0" lvl="0" indent="0">
+              <a:buNone/>
+            </a:pPr>
+            <a:r>
+              <a:t>ML과 보정 트랙</a:t>
+            </a:r>
+          </a:p>
+        </p:txBody>
+      </p:sp>
+      <p:graphicFrame>
+        <p:nvGraphicFramePr>
+          <p:cNvPr id="6" name="Content Placeholder 5"/>
+          <p:cNvGraphicFramePr>
+            <a:graphicFrameLocks noGrp="1"/>
+          </p:cNvGraphicFramePr>
+          <p:nvPr>
+            <p:ph idx="1"/>
+            <p:extLst>
+              <p:ext uri="{D42A27DB-BD31-4B8C-83A1-F6EECF244321}">
+                <p14:modId xmlns:p14="http://schemas.microsoft.com/office/powerpoint/2010/main" val="3486548973"/>
+              </p:ext>
+            </p:extLst>
+          </p:nvPr>
+        </p:nvGraphicFramePr>
+        <p:xfrm>
+          <a:off x="838200" y="1816100"/>
+          <a:ext cx="10515600" cy="2834640"/>
+        </p:xfrm>
+        <a:graphic>
+          <a:graphicData uri="http://schemas.openxmlformats.org/drawingml/2006/table">
+            <a:tbl>
+              <a:tblPr firstRow="1" bandRow="1">
+                <a:tableStyleId>{5C22544A-7EE6-4342-B048-85BDC9FD1C3A}</a:tableStyleId>
+              </a:tblPr>
+              <a:tblGrid>
+                <a:gridCol w="2584622">
+                  <a:extLst>
+                    <a:ext uri="{9D8B030D-6E8A-4147-A177-3AD203B41FA5}">
+                      <a16:colId xmlns:a16="http://schemas.microsoft.com/office/drawing/2014/main" val="20000"/>
+                    </a:ext>
+                  </a:extLst>
+                </a:gridCol>
+                <a:gridCol w="4077729">
+                  <a:extLst>
+                    <a:ext uri="{9D8B030D-6E8A-4147-A177-3AD203B41FA5}">
+                      <a16:colId xmlns:a16="http://schemas.microsoft.com/office/drawing/2014/main" val="20001"/>
+                    </a:ext>
+                  </a:extLst>
+                </a:gridCol>
+                <a:gridCol w="3853249">
+                  <a:extLst>
+                    <a:ext uri="{9D8B030D-6E8A-4147-A177-3AD203B41FA5}">
+                      <a16:colId xmlns:a16="http://schemas.microsoft.com/office/drawing/2014/main" val="20002"/>
+                    </a:ext>
+                  </a:extLst>
+                </a:gridCol>
+              </a:tblGrid>
+              <a:tr h="0">
+                <a:tc>
+                  <a:txBody>
+                    <a:bodyPr/>
+                    <a:lstStyle/>
+                    <a:p>
+                      <a:pPr marL="0" lvl="0" indent="0">
+                        <a:buNone/>
+                      </a:pPr>
+                      <a:r>
+                        <a:t>조건</a:t>
+                      </a:r>
+                    </a:p>
+                  </a:txBody>
+                  <a:tcPr/>
+                </a:tc>
+                <a:tc>
+                  <a:txBody>
+                    <a:bodyPr/>
+                    <a:lstStyle/>
+                    <a:p>
+                      <a:pPr marL="0" lvl="0" indent="0">
+                        <a:buNone/>
+                      </a:pPr>
+                      <a:r>
+                        <a:t>입력</a:t>
+                      </a:r>
+                    </a:p>
+                  </a:txBody>
+                  <a:tcPr/>
+                </a:tc>
+                <a:tc>
+                  <a:txBody>
+                    <a:bodyPr/>
+                    <a:lstStyle/>
+                    <a:p>
+                      <a:pPr marL="0" lvl="0" indent="0">
+                        <a:buNone/>
+                      </a:pPr>
+                      <a:r>
+                        <a:t>출력</a:t>
+                      </a:r>
+                    </a:p>
+                  </a:txBody>
+                  <a:tcPr/>
+                </a:tc>
+                <a:extLst>
+                  <a:ext uri="{0D108BD9-81ED-4DB2-BD59-A6C34878D82A}">
+                    <a16:rowId xmlns:a16="http://schemas.microsoft.com/office/drawing/2014/main" val="10000"/>
+                  </a:ext>
+                </a:extLst>
+              </a:tr>
+              <a:tr h="0">
+                <a:tc>
+                  <a:txBody>
+                    <a:bodyPr/>
+                    <a:lstStyle/>
+                    <a:p>
+                      <a:pPr marL="0" lvl="0" indent="0">
+                        <a:buNone/>
+                      </a:pPr>
+                      <a:r>
+                        <a:t>A. 보정된 baseline</a:t>
+                      </a:r>
+                    </a:p>
+                  </a:txBody>
+                  <a:tcPr/>
+                </a:tc>
+                <a:tc>
+                  <a:txBody>
+                    <a:bodyPr/>
+                    <a:lstStyle/>
+                    <a:p>
+                      <a:pPr marL="0" lvl="0" indent="0">
+                        <a:buNone/>
+                      </a:pPr>
+                      <a:r>
+                        <a:t>ESM-2 단백질 임베딩, Morgan fingerprint, AlphaFold DB pocket feature, 학습 split</a:t>
+                      </a:r>
+                    </a:p>
+                  </a:txBody>
+                  <a:tcPr/>
+                </a:tc>
+                <a:tc>
+                  <a:txBody>
+                    <a:bodyPr/>
+                    <a:lstStyle/>
+                    <a:p>
+                      <a:pPr marL="0" lvl="0" indent="0">
+                        <a:buNone/>
+                      </a:pPr>
+                      <a:r>
+                        <a:rPr>
+                          <a:latin typeface="Courier"/>
+                        </a:rPr>
+                        <a:t>binds</a:t>
+                      </a:r>
+                      <a:r>
+                        <a:t> 확률, conformal 예측 집합 (</a:t>
+                      </a:r>
+                      <a:r>
+                        <a:rPr>
+                          <a:latin typeface="Courier"/>
+                        </a:rPr>
+                        <a:t>{binds, not binds}</a:t>
+                      </a:r>
+                      <a:r>
+                        <a:t>이면 기권)</a:t>
+                      </a:r>
+                    </a:p>
+                  </a:txBody>
+                  <a:tcPr/>
+                </a:tc>
+                <a:extLst>
+                  <a:ext uri="{0D108BD9-81ED-4DB2-BD59-A6C34878D82A}">
+                    <a16:rowId xmlns:a16="http://schemas.microsoft.com/office/drawing/2014/main" val="10001"/>
+                  </a:ext>
+                </a:extLst>
+              </a:tr>
+              <a:tr h="0">
+                <a:tc>
+                  <a:txBody>
+                    <a:bodyPr/>
+                    <a:lstStyle/>
+                    <a:p>
+                      <a:pPr marL="0" lvl="0" indent="0">
+                        <a:buNone/>
+                      </a:pPr>
+                      <a:r>
+                        <a:t>F. Boltz-2 (GPU 조건부)</a:t>
+                      </a:r>
+                    </a:p>
+                  </a:txBody>
+                  <a:tcPr/>
+                </a:tc>
+                <a:tc>
+                  <a:txBody>
+                    <a:bodyPr/>
+                    <a:lstStyle/>
+                    <a:p>
+                      <a:pPr marL="0" lvl="0" indent="0">
+                        <a:buNone/>
+                      </a:pPr>
+                      <a:r>
+                        <a:t>서열 + SMILES, 난이도 층화 200쌍</a:t>
+                      </a:r>
+                    </a:p>
+                  </a:txBody>
+                  <a:tcPr/>
+                </a:tc>
+                <a:tc>
+                  <a:txBody>
+                    <a:bodyPr/>
+                    <a:lstStyle/>
+                    <a:p>
+                      <a:pPr marL="0" lvl="0" indent="0">
+                        <a:buNone/>
+                      </a:pPr>
+                      <a:r>
+                        <a:rPr>
+                          <a:latin typeface="Courier"/>
+                        </a:rPr>
+                        <a:t>affinity_probability_binary</a:t>
+                      </a:r>
+                      <a:r>
+                        <a:t>, </a:t>
+                      </a:r>
+                      <a:r>
+                        <a:rPr>
+                          <a:latin typeface="Courier"/>
+                        </a:rPr>
+                        <a:t>ligand_iptm</a:t>
+                      </a:r>
+                      <a:r>
+                        <a:t>, conformal 예측 집합</a:t>
+                      </a:r>
+                    </a:p>
+                  </a:txBody>
+                  <a:tcPr/>
+                </a:tc>
+                <a:extLst>
+                  <a:ext uri="{0D108BD9-81ED-4DB2-BD59-A6C34878D82A}">
+                    <a16:rowId xmlns:a16="http://schemas.microsoft.com/office/drawing/2014/main" val="10002"/>
+                  </a:ext>
+                </a:extLst>
+              </a:tr>
+              <a:tr h="0">
+                <a:tc>
+                  <a:txBody>
+                    <a:bodyPr/>
+                    <a:lstStyle/>
+                    <a:p>
+                      <a:pPr marL="0" lvl="0" indent="0">
+                        <a:buNone/>
+                      </a:pPr>
+                      <a:r>
+                        <a:t>E 절차</a:t>
+                      </a:r>
+                    </a:p>
+                  </a:txBody>
+                  <a:tcPr/>
+                </a:tc>
+                <a:tc>
+                  <a:txBody>
+                    <a:bodyPr/>
+                    <a:lstStyle/>
+                    <a:p>
+                      <a:pPr marL="0" lvl="0" indent="0">
+                        <a:buNone/>
+                      </a:pPr>
+                      <a:r>
+                        <a:t>에이전트 트랙의 신뢰도 로그</a:t>
+                      </a:r>
+                    </a:p>
+                  </a:txBody>
+                  <a:tcPr/>
+                </a:tc>
+                <a:tc>
+                  <a:txBody>
+                    <a:bodyPr/>
+                    <a:lstStyle/>
+                    <a:p>
+                      <a:pPr marL="0" lvl="0" indent="0">
+                        <a:buNone/>
+                      </a:pPr>
+                      <a:r>
+                        <a:rPr dirty="0" err="1"/>
+                        <a:t>A와</a:t>
+                      </a:r>
+                      <a:r>
+                        <a:rPr dirty="0"/>
+                        <a:t> </a:t>
+                      </a:r>
+                      <a:r>
+                        <a:rPr dirty="0" err="1"/>
+                        <a:t>같은</a:t>
+                      </a:r>
+                      <a:r>
+                        <a:rPr dirty="0"/>
+                        <a:t> conformal </a:t>
+                      </a:r>
+                      <a:r>
+                        <a:rPr dirty="0" err="1"/>
+                        <a:t>절차를</a:t>
+                      </a:r>
+                      <a:r>
+                        <a:rPr dirty="0"/>
+                        <a:t> </a:t>
+                      </a:r>
+                      <a:r>
+                        <a:rPr dirty="0" err="1"/>
+                        <a:t>적용한</a:t>
+                      </a:r>
+                      <a:r>
+                        <a:rPr dirty="0"/>
+                        <a:t> </a:t>
+                      </a:r>
+                      <a:r>
+                        <a:rPr dirty="0" err="1"/>
+                        <a:t>예측</a:t>
+                      </a:r>
+                      <a:r>
+                        <a:rPr dirty="0"/>
+                        <a:t> </a:t>
+                      </a:r>
+                      <a:r>
+                        <a:rPr dirty="0" err="1"/>
+                        <a:t>집합</a:t>
+                      </a:r>
+                      <a:endParaRPr dirty="0"/>
+                    </a:p>
+                  </a:txBody>
+                  <a:tcPr/>
+                </a:tc>
+                <a:extLst>
+                  <a:ext uri="{0D108BD9-81ED-4DB2-BD59-A6C34878D82A}">
+                    <a16:rowId xmlns:a16="http://schemas.microsoft.com/office/drawing/2014/main" val="10003"/>
+                  </a:ext>
+                </a:extLst>
+              </a:tr>
+            </a:tbl>
+          </a:graphicData>
+        </a:graphic>
+      </p:graphicFrame>
+      <p:sp>
+        <p:nvSpPr>
+          <p:cNvPr id="4" name="TextBox 3">
+            <a:extLst>
+              <a:ext uri="{FF2B5EF4-FFF2-40B4-BE49-F238E27FC236}">
+                <a16:creationId xmlns:a16="http://schemas.microsoft.com/office/drawing/2014/main" id="{E6CD0935-628C-FB22-2B39-A94DC5D0DDF2}"/>
+              </a:ext>
+            </a:extLst>
+          </p:cNvPr>
+          <p:cNvSpPr txBox="1"/>
+          <p:nvPr/>
+        </p:nvSpPr>
+        <p:spPr>
+          <a:xfrm>
+            <a:off x="838200" y="4875006"/>
+            <a:ext cx="10778181" cy="307777"/>
+          </a:xfrm>
+          <a:prstGeom prst="rect">
+            <a:avLst/>
+          </a:prstGeom>
+          <a:noFill/>
+        </p:spPr>
+        <p:txBody>
+          <a:bodyPr wrap="square">
+            <a:spAutoFit/>
+          </a:bodyPr>
+          <a:lstStyle/>
+          <a:p>
+            <a:pPr marL="0" lvl="0" indent="0">
+              <a:buNone/>
+            </a:pPr>
+            <a:r>
+              <a:rPr lang="en-US" sz="1400" dirty="0"/>
+              <a:t>OpenFold3</a:t>
+            </a:r>
+            <a:r>
+              <a:rPr lang="ko-KR" altLang="en-US" sz="1400" dirty="0"/>
+              <a:t>는 </a:t>
+            </a:r>
+            <a:r>
+              <a:rPr lang="en-US" sz="1400" dirty="0"/>
+              <a:t>F</a:t>
+            </a:r>
+            <a:r>
+              <a:rPr lang="ko-KR" altLang="en-US" sz="1400" dirty="0"/>
+              <a:t>에서 빠지고 구조 품질 레퍼런스로 씁니다</a:t>
+            </a:r>
+            <a:r>
+              <a:rPr lang="en-US" altLang="ko-KR" sz="1400" dirty="0"/>
+              <a:t>. </a:t>
+            </a:r>
+            <a:r>
+              <a:rPr lang="ko-KR" altLang="en-US" sz="1400" dirty="0"/>
+              <a:t>조사한 </a:t>
+            </a:r>
+            <a:r>
+              <a:rPr lang="en-US" sz="1400" dirty="0"/>
+              <a:t>co-folding </a:t>
+            </a:r>
+            <a:r>
+              <a:rPr lang="ko-KR" altLang="en-US" sz="1400" dirty="0"/>
+              <a:t>모델 </a:t>
+            </a:r>
+            <a:r>
+              <a:rPr lang="en-US" altLang="ko-KR" sz="1400" dirty="0"/>
+              <a:t>7</a:t>
+            </a:r>
+            <a:r>
+              <a:rPr lang="ko-KR" altLang="en-US" sz="1400" dirty="0"/>
+              <a:t>개 중 </a:t>
+            </a:r>
+            <a:r>
+              <a:rPr lang="en-US" sz="1400" dirty="0"/>
+              <a:t>affinity</a:t>
+            </a:r>
+            <a:r>
+              <a:rPr lang="ko-KR" altLang="en-US" sz="1400" dirty="0" err="1"/>
+              <a:t>를</a:t>
+            </a:r>
+            <a:r>
+              <a:rPr lang="ko-KR" altLang="en-US" sz="1400" dirty="0"/>
+              <a:t> 출력하는 것은 </a:t>
+            </a:r>
+            <a:r>
+              <a:rPr lang="en-US" sz="1400" dirty="0"/>
+              <a:t>Boltz-2</a:t>
+            </a:r>
+            <a:r>
+              <a:rPr lang="ko-KR" altLang="en-US" sz="1400" dirty="0"/>
+              <a:t>뿐입니다</a:t>
+            </a:r>
+            <a:r>
+              <a:rPr lang="en-US" altLang="ko-KR" sz="1400" dirty="0"/>
+              <a:t>.</a:t>
+            </a:r>
+          </a:p>
+        </p:txBody>
+      </p:sp>
+    </p:spTree>
+  </p:cSld>
+  <p:clrMapOvr>
+    <a:masterClrMapping/>
+  </p:clrMapOvr>
+</p:sld>
+</file>
+
+<file path=ppt/slides/slide17.xml><?xml version="1.0" encoding="utf-8"?>
+<p:sld xmlns:a="http://schemas.openxmlformats.org/drawingml/2006/main" xmlns:r="http://schemas.openxmlformats.org/officeDocument/2006/relationships" xmlns:p="http://schemas.openxmlformats.org/presentationml/2006/main">
+  <p:cSld>
+    <p:spTree>
+      <p:nvGrpSpPr>
+        <p:cNvPr id="1" name=""/>
+        <p:cNvGrpSpPr/>
+        <p:nvPr/>
+      </p:nvGrpSpPr>
+      <p:grpSpPr>
+        <a:xfrm>
+          <a:off x="0" y="0"/>
+          <a:ext cx="0" cy="0"/>
+          <a:chOff x="0" y="0"/>
+          <a:chExt cx="0" cy="0"/>
+        </a:xfrm>
+      </p:grpSpPr>
+      <p:sp>
+        <p:nvSpPr>
+          <p:cNvPr id="2" name="Title 1">
+            <a:extLst>
+              <a:ext uri="{FF2B5EF4-FFF2-40B4-BE49-F238E27FC236}">
+                <a16:creationId xmlns:a16="http://schemas.microsoft.com/office/drawing/2014/main" id="{C9CE818D-09AE-4CD2-3C65-237AD773CD9F}"/>
+              </a:ext>
+            </a:extLst>
+          </p:cNvPr>
+          <p:cNvSpPr>
+            <a:spLocks noGrp="1"/>
+          </p:cNvSpPr>
+          <p:nvPr>
+            <p:ph type="title"/>
+          </p:nvPr>
+        </p:nvSpPr>
+        <p:spPr/>
+        <p:txBody>
+          <a:bodyPr/>
+          <a:lstStyle/>
+          <a:p>
+            <a:pPr marL="0" lvl="0" indent="0">
+              <a:buNone/>
+            </a:pPr>
+            <a:r>
+              <a:t>에이전트 트랙</a:t>
+            </a:r>
+          </a:p>
+        </p:txBody>
+      </p:sp>
+      <p:graphicFrame>
+        <p:nvGraphicFramePr>
+          <p:cNvPr id="6" name="Content Placeholder 5"/>
+          <p:cNvGraphicFramePr>
+            <a:graphicFrameLocks noGrp="1"/>
+          </p:cNvGraphicFramePr>
+          <p:nvPr>
+            <p:ph idx="1"/>
+            <p:extLst>
+              <p:ext uri="{D42A27DB-BD31-4B8C-83A1-F6EECF244321}">
+                <p14:modId xmlns:p14="http://schemas.microsoft.com/office/powerpoint/2010/main" val="173898358"/>
+              </p:ext>
+            </p:extLst>
+          </p:nvPr>
+        </p:nvGraphicFramePr>
+        <p:xfrm>
+          <a:off x="838200" y="1816100"/>
+          <a:ext cx="10515600" cy="3566160"/>
+        </p:xfrm>
+        <a:graphic>
+          <a:graphicData uri="http://schemas.openxmlformats.org/drawingml/2006/table">
+            <a:tbl>
+              <a:tblPr firstRow="1" bandRow="1">
+                <a:tableStyleId>{5C22544A-7EE6-4342-B048-85BDC9FD1C3A}</a:tableStyleId>
+              </a:tblPr>
+              <a:tblGrid>
+                <a:gridCol w="2535195">
+                  <a:extLst>
+                    <a:ext uri="{9D8B030D-6E8A-4147-A177-3AD203B41FA5}">
+                      <a16:colId xmlns:a16="http://schemas.microsoft.com/office/drawing/2014/main" val="20000"/>
+                    </a:ext>
+                  </a:extLst>
+                </a:gridCol>
+                <a:gridCol w="3645243">
+                  <a:extLst>
+                    <a:ext uri="{9D8B030D-6E8A-4147-A177-3AD203B41FA5}">
+                      <a16:colId xmlns:a16="http://schemas.microsoft.com/office/drawing/2014/main" val="20001"/>
+                    </a:ext>
+                  </a:extLst>
+                </a:gridCol>
+                <a:gridCol w="4335162">
+                  <a:extLst>
+                    <a:ext uri="{9D8B030D-6E8A-4147-A177-3AD203B41FA5}">
+                      <a16:colId xmlns:a16="http://schemas.microsoft.com/office/drawing/2014/main" val="20002"/>
+                    </a:ext>
+                  </a:extLst>
+                </a:gridCol>
+              </a:tblGrid>
+              <a:tr h="0">
+                <a:tc>
+                  <a:txBody>
+                    <a:bodyPr/>
+                    <a:lstStyle/>
+                    <a:p>
+                      <a:pPr marL="0" lvl="0" indent="0">
+                        <a:buNone/>
+                      </a:pPr>
+                      <a:r>
+                        <a:t>조건</a:t>
+                      </a:r>
+                    </a:p>
+                  </a:txBody>
+                  <a:tcPr/>
+                </a:tc>
+                <a:tc>
+                  <a:txBody>
+                    <a:bodyPr/>
+                    <a:lstStyle/>
+                    <a:p>
+                      <a:pPr marL="0" lvl="0" indent="0">
+                        <a:buNone/>
+                      </a:pPr>
+                      <a:r>
+                        <a:t>입력</a:t>
+                      </a:r>
+                    </a:p>
+                  </a:txBody>
+                  <a:tcPr/>
+                </a:tc>
+                <a:tc>
+                  <a:txBody>
+                    <a:bodyPr/>
+                    <a:lstStyle/>
+                    <a:p>
+                      <a:pPr marL="0" lvl="0" indent="0">
+                        <a:buNone/>
+                      </a:pPr>
+                      <a:r>
+                        <a:t>출력 (JSON)</a:t>
+                      </a:r>
+                    </a:p>
+                  </a:txBody>
+                  <a:tcPr/>
+                </a:tc>
+                <a:extLst>
+                  <a:ext uri="{0D108BD9-81ED-4DB2-BD59-A6C34878D82A}">
+                    <a16:rowId xmlns:a16="http://schemas.microsoft.com/office/drawing/2014/main" val="10000"/>
+                  </a:ext>
+                </a:extLst>
+              </a:tr>
+              <a:tr h="0">
+                <a:tc>
+                  <a:txBody>
+                    <a:bodyPr/>
+                    <a:lstStyle/>
+                    <a:p>
+                      <a:pPr marL="0" lvl="0" indent="0">
+                        <a:buNone/>
+                      </a:pPr>
+                      <a:r>
+                        <a:t>B. Zero-shot LLM</a:t>
+                      </a:r>
+                    </a:p>
+                  </a:txBody>
+                  <a:tcPr/>
+                </a:tc>
+                <a:tc>
+                  <a:txBody>
+                    <a:bodyPr/>
+                    <a:lstStyle/>
+                    <a:p>
+                      <a:pPr marL="0" lvl="0" indent="0">
+                        <a:buNone/>
+                      </a:pPr>
+                      <a:r>
+                        <a:t>서열 + SMILES, 도구 없음</a:t>
+                      </a:r>
+                    </a:p>
+                  </a:txBody>
+                  <a:tcPr/>
+                </a:tc>
+                <a:tc>
+                  <a:txBody>
+                    <a:bodyPr/>
+                    <a:lstStyle/>
+                    <a:p>
+                      <a:pPr marL="0" lvl="0" indent="0">
+                        <a:buNone/>
+                      </a:pPr>
+                      <a:r>
+                        <a:rPr>
+                          <a:latin typeface="Courier"/>
+                        </a:rPr>
+                        <a:t>binds</a:t>
+                      </a:r>
+                      <a:r>
+                        <a:t>, </a:t>
+                      </a:r>
+                      <a:r>
+                        <a:rPr>
+                          <a:latin typeface="Courier"/>
+                        </a:rPr>
+                        <a:t>confidence</a:t>
+                      </a:r>
+                      <a:r>
+                        <a:t>, </a:t>
+                      </a:r>
+                      <a:r>
+                        <a:rPr>
+                          <a:latin typeface="Courier"/>
+                        </a:rPr>
+                        <a:t>pAffinity</a:t>
+                      </a:r>
+                      <a:r>
+                        <a:t>, </a:t>
+                      </a:r>
+                      <a:r>
+                        <a:rPr>
+                          <a:latin typeface="Courier"/>
+                        </a:rPr>
+                        <a:t>reasoning</a:t>
+                      </a:r>
+                    </a:p>
+                  </a:txBody>
+                  <a:tcPr/>
+                </a:tc>
+                <a:extLst>
+                  <a:ext uri="{0D108BD9-81ED-4DB2-BD59-A6C34878D82A}">
+                    <a16:rowId xmlns:a16="http://schemas.microsoft.com/office/drawing/2014/main" val="10001"/>
+                  </a:ext>
+                </a:extLst>
+              </a:tr>
+              <a:tr h="0">
+                <a:tc>
+                  <a:txBody>
+                    <a:bodyPr/>
+                    <a:lstStyle/>
+                    <a:p>
+                      <a:pPr marL="0" lvl="0" indent="0">
+                        <a:buNone/>
+                      </a:pPr>
+                      <a:r>
+                        <a:t>C. Agent</a:t>
+                      </a:r>
+                    </a:p>
+                  </a:txBody>
+                  <a:tcPr/>
+                </a:tc>
+                <a:tc>
+                  <a:txBody>
+                    <a:bodyPr/>
+                    <a:lstStyle/>
+                    <a:p>
+                      <a:pPr marL="0" lvl="0" indent="0">
+                        <a:buNone/>
+                      </a:pPr>
+                      <a:r>
+                        <a:t>서열 + SMILES, ToolUniverse MCP 도구</a:t>
+                      </a:r>
+                    </a:p>
+                  </a:txBody>
+                  <a:tcPr/>
+                </a:tc>
+                <a:tc>
+                  <a:txBody>
+                    <a:bodyPr/>
+                    <a:lstStyle/>
+                    <a:p>
+                      <a:pPr marL="0" lvl="0" indent="0">
+                        <a:buNone/>
+                      </a:pPr>
+                      <a:r>
+                        <a:t>B 필드 + </a:t>
+                      </a:r>
+                      <a:r>
+                        <a:rPr>
+                          <a:latin typeface="Courier"/>
+                        </a:rPr>
+                        <a:t>identified_target</a:t>
+                      </a:r>
+                      <a:r>
+                        <a:t>, </a:t>
+                      </a:r>
+                      <a:r>
+                        <a:rPr>
+                          <a:latin typeface="Courier"/>
+                        </a:rPr>
+                        <a:t>direct_measurement_found</a:t>
+                      </a:r>
+                      <a:r>
+                        <a:t>, </a:t>
+                      </a:r>
+                      <a:r>
+                        <a:rPr>
+                          <a:latin typeface="Courier"/>
+                        </a:rPr>
+                        <a:t>evidence</a:t>
+                      </a:r>
+                    </a:p>
+                  </a:txBody>
+                  <a:tcPr/>
+                </a:tc>
+                <a:extLst>
+                  <a:ext uri="{0D108BD9-81ED-4DB2-BD59-A6C34878D82A}">
+                    <a16:rowId xmlns:a16="http://schemas.microsoft.com/office/drawing/2014/main" val="10002"/>
+                  </a:ext>
+                </a:extLst>
+              </a:tr>
+              <a:tr h="0">
+                <a:tc>
+                  <a:txBody>
+                    <a:bodyPr/>
+                    <a:lstStyle/>
+                    <a:p>
+                      <a:pPr marL="0" lvl="0" indent="0">
+                        <a:buNone/>
+                      </a:pPr>
+                      <a:r>
+                        <a:t>D. Agent + 기권</a:t>
+                      </a:r>
+                    </a:p>
+                  </a:txBody>
+                  <a:tcPr/>
+                </a:tc>
+                <a:tc>
+                  <a:txBody>
+                    <a:bodyPr/>
+                    <a:lstStyle/>
+                    <a:p>
+                      <a:pPr marL="0" lvl="0" indent="0">
+                        <a:buNone/>
+                      </a:pPr>
+                      <a:r>
+                        <a:t>C와 같음, 기권 허용</a:t>
+                      </a:r>
+                    </a:p>
+                  </a:txBody>
+                  <a:tcPr/>
+                </a:tc>
+                <a:tc>
+                  <a:txBody>
+                    <a:bodyPr/>
+                    <a:lstStyle/>
+                    <a:p>
+                      <a:pPr marL="0" lvl="0" indent="0">
+                        <a:buNone/>
+                      </a:pPr>
+                      <a:r>
+                        <a:t>C 필드 + </a:t>
+                      </a:r>
+                      <a:r>
+                        <a:rPr>
+                          <a:latin typeface="Courier"/>
+                        </a:rPr>
+                        <a:t>abstain</a:t>
+                      </a:r>
+                    </a:p>
+                  </a:txBody>
+                  <a:tcPr/>
+                </a:tc>
+                <a:extLst>
+                  <a:ext uri="{0D108BD9-81ED-4DB2-BD59-A6C34878D82A}">
+                    <a16:rowId xmlns:a16="http://schemas.microsoft.com/office/drawing/2014/main" val="10003"/>
+                  </a:ext>
+                </a:extLst>
+              </a:tr>
+              <a:tr h="0">
+                <a:tc>
+                  <a:txBody>
+                    <a:bodyPr/>
+                    <a:lstStyle/>
+                    <a:p>
+                      <a:pPr marL="0" lvl="0" indent="0">
+                        <a:buNone/>
+                      </a:pPr>
+                      <a:r>
+                        <a:t>반복 실행</a:t>
+                      </a:r>
+                    </a:p>
+                  </a:txBody>
+                  <a:tcPr/>
+                </a:tc>
+                <a:tc>
+                  <a:txBody>
+                    <a:bodyPr/>
+                    <a:lstStyle/>
+                    <a:p>
+                      <a:pPr marL="0" lvl="0" indent="0">
+                        <a:buNone/>
+                      </a:pPr>
+                      <a:r>
+                        <a:t>같은 쿼리 3회, temperature 0.7</a:t>
+                      </a:r>
+                    </a:p>
+                  </a:txBody>
+                  <a:tcPr/>
+                </a:tc>
+                <a:tc>
+                  <a:txBody>
+                    <a:bodyPr/>
+                    <a:lstStyle/>
+                    <a:p>
+                      <a:pPr marL="0" lvl="0" indent="0">
+                        <a:buNone/>
+                      </a:pPr>
+                      <a:r>
+                        <a:t>flip rate, 조건 E용 신뢰도 로그, 토큰·지연·비용</a:t>
+                      </a:r>
+                    </a:p>
+                  </a:txBody>
+                  <a:tcPr/>
+                </a:tc>
+                <a:extLst>
+                  <a:ext uri="{0D108BD9-81ED-4DB2-BD59-A6C34878D82A}">
+                    <a16:rowId xmlns:a16="http://schemas.microsoft.com/office/drawing/2014/main" val="10004"/>
+                  </a:ext>
+                </a:extLst>
+              </a:tr>
+              <a:tr h="0">
+                <a:tc>
+                  <a:txBody>
+                    <a:bodyPr/>
+                    <a:lstStyle/>
+                    <a:p>
+                      <a:pPr marL="0" lvl="0" indent="0">
+                        <a:buNone/>
+                      </a:pPr>
+                      <a:r>
+                        <a:t>교란 감사</a:t>
+                      </a:r>
+                    </a:p>
+                  </a:txBody>
+                  <a:tcPr/>
+                </a:tc>
+                <a:tc>
+                  <a:txBody>
+                    <a:bodyPr/>
+                    <a:lstStyle/>
+                    <a:p>
+                      <a:pPr marL="0" lvl="0" indent="0">
+                        <a:buNone/>
+                      </a:pPr>
+                      <a:r>
+                        <a:t>도구 출력에 오류 4종 주입 (단위, 엔트리, 동일성, 식별자)</a:t>
+                      </a:r>
+                    </a:p>
+                  </a:txBody>
+                  <a:tcPr/>
+                </a:tc>
+                <a:tc>
+                  <a:txBody>
+                    <a:bodyPr/>
+                    <a:lstStyle/>
+                    <a:p>
+                      <a:pPr marL="0" lvl="0" indent="0">
+                        <a:buNone/>
+                      </a:pPr>
+                      <a:r>
+                        <a:rPr dirty="0" err="1"/>
+                        <a:t>교란</a:t>
+                      </a:r>
+                      <a:r>
+                        <a:rPr dirty="0"/>
+                        <a:t> </a:t>
+                      </a:r>
+                      <a:r>
+                        <a:rPr dirty="0" err="1"/>
+                        <a:t>탐지율</a:t>
+                      </a:r>
+                      <a:endParaRPr dirty="0"/>
+                    </a:p>
+                  </a:txBody>
+                  <a:tcPr/>
+                </a:tc>
+                <a:extLst>
+                  <a:ext uri="{0D108BD9-81ED-4DB2-BD59-A6C34878D82A}">
+                    <a16:rowId xmlns:a16="http://schemas.microsoft.com/office/drawing/2014/main" val="10005"/>
+                  </a:ext>
+                </a:extLst>
+              </a:tr>
+            </a:tbl>
+          </a:graphicData>
+        </a:graphic>
+      </p:graphicFrame>
+    </p:spTree>
+  </p:cSld>
+  <p:clrMapOvr>
+    <a:masterClrMapping/>
+  </p:clrMapOvr>
+</p:sld>
+</file>
+
+<file path=ppt/slides/slide18.xml><?xml version="1.0" encoding="utf-8"?>
+<p:sld xmlns:a="http://schemas.openxmlformats.org/drawingml/2006/main" xmlns:r="http://schemas.openxmlformats.org/officeDocument/2006/relationships" xmlns:p="http://schemas.openxmlformats.org/presentationml/2006/main">
+  <p:cSld>
+    <p:spTree>
+      <p:nvGrpSpPr>
+        <p:cNvPr id="1" name=""/>
+        <p:cNvGrpSpPr/>
+        <p:nvPr/>
+      </p:nvGrpSpPr>
+      <p:grpSpPr>
+        <a:xfrm>
+          <a:off x="0" y="0"/>
+          <a:ext cx="0" cy="0"/>
+          <a:chOff x="0" y="0"/>
+          <a:chExt cx="0" cy="0"/>
+        </a:xfrm>
+      </p:grpSpPr>
+      <p:pic>
+        <p:nvPicPr>
+          <p:cNvPr id="5" name="Picture 4">
+            <a:extLst>
+              <a:ext uri="{FF2B5EF4-FFF2-40B4-BE49-F238E27FC236}">
+                <a16:creationId xmlns:a16="http://schemas.microsoft.com/office/drawing/2014/main" id="{740C15CD-D3B6-8572-DDA4-7E6B32AA0312}"/>
+              </a:ext>
+            </a:extLst>
+          </p:cNvPr>
+          <p:cNvPicPr>
+            <a:picLocks noChangeAspect="1"/>
+          </p:cNvPicPr>
+          <p:nvPr/>
+        </p:nvPicPr>
+        <p:blipFill>
+          <a:blip r:embed="rId2"/>
+          <a:stretch>
+            <a:fillRect/>
+          </a:stretch>
+        </p:blipFill>
+        <p:spPr>
+          <a:xfrm>
+            <a:off x="548318" y="917944"/>
+            <a:ext cx="11095364" cy="5022111"/>
+          </a:xfrm>
+          <a:prstGeom prst="rect">
+            <a:avLst/>
+          </a:prstGeom>
+        </p:spPr>
+      </p:pic>
     </p:spTree>
     <p:extLst>
       <p:ext uri="{BB962C8B-B14F-4D97-AF65-F5344CB8AC3E}">
-        <p14:creationId xmlns:p14="http://schemas.microsoft.com/office/powerpoint/2010/main" val="3688739913"/>
+        <p14:creationId xmlns:p14="http://schemas.microsoft.com/office/powerpoint/2010/main" val="1145181018"/>
+      </p:ext>
+    </p:extLst>
+  </p:cSld>
+  <p:clrMapOvr>
+    <a:masterClrMapping/>
+  </p:clrMapOvr>
+</p:sld>
+</file>
+
+<file path=ppt/slides/slide19.xml><?xml version="1.0" encoding="utf-8"?>
+<p:sld xmlns:a="http://schemas.openxmlformats.org/drawingml/2006/main" xmlns:r="http://schemas.openxmlformats.org/officeDocument/2006/relationships" xmlns:p="http://schemas.openxmlformats.org/presentationml/2006/main">
+  <p:cSld>
+    <p:spTree>
+      <p:nvGrpSpPr>
+        <p:cNvPr id="1" name="">
+          <a:extLst>
+            <a:ext uri="{FF2B5EF4-FFF2-40B4-BE49-F238E27FC236}">
+              <a16:creationId xmlns:a16="http://schemas.microsoft.com/office/drawing/2014/main" id="{03B4715F-CCB5-3831-C13E-96BB1F7009F1}"/>
+            </a:ext>
+          </a:extLst>
+        </p:cNvPr>
+        <p:cNvGrpSpPr/>
+        <p:nvPr/>
+      </p:nvGrpSpPr>
+      <p:grpSpPr>
+        <a:xfrm>
+          <a:off x="0" y="0"/>
+          <a:ext cx="0" cy="0"/>
+          <a:chOff x="0" y="0"/>
+          <a:chExt cx="0" cy="0"/>
+        </a:xfrm>
+      </p:grpSpPr>
+      <p:sp>
+        <p:nvSpPr>
+          <p:cNvPr id="2" name="Title 1">
+            <a:extLst>
+              <a:ext uri="{FF2B5EF4-FFF2-40B4-BE49-F238E27FC236}">
+                <a16:creationId xmlns:a16="http://schemas.microsoft.com/office/drawing/2014/main" id="{CF1E214B-CDDA-B304-5FF6-4FB1F073819C}"/>
+              </a:ext>
+            </a:extLst>
+          </p:cNvPr>
+          <p:cNvSpPr>
+            <a:spLocks noGrp="1"/>
+          </p:cNvSpPr>
+          <p:nvPr>
+            <p:ph type="title"/>
+          </p:nvPr>
+        </p:nvSpPr>
+        <p:spPr>
+          <a:xfrm>
+            <a:off x="831850" y="1709738"/>
+            <a:ext cx="10515600" cy="2852737"/>
+          </a:xfrm>
+        </p:spPr>
+        <p:txBody>
+          <a:bodyPr/>
+          <a:lstStyle/>
+          <a:p>
+            <a:pPr marL="0" lvl="0" indent="0">
+              <a:buNone/>
+            </a:pPr>
+            <a:r>
+              <a:rPr lang="ko-KR" altLang="en-US" dirty="0"/>
+              <a:t>트랙 선정</a:t>
+            </a:r>
+            <a:endParaRPr dirty="0"/>
+          </a:p>
+        </p:txBody>
+      </p:sp>
+    </p:spTree>
+    <p:extLst>
+      <p:ext uri="{BB962C8B-B14F-4D97-AF65-F5344CB8AC3E}">
+        <p14:creationId xmlns:p14="http://schemas.microsoft.com/office/powerpoint/2010/main" val="1500128456"/>
       </p:ext>
     </p:extLst>
   </p:cSld>
@@ -3578,7 +6611,7 @@
         <p:spPr/>
         <p:txBody>
           <a:bodyPr>
-            <a:normAutofit lnSpcReduction="10000"/>
+            <a:normAutofit fontScale="92500" lnSpcReduction="20000"/>
           </a:bodyPr>
           <a:lstStyle/>
           <a:p>
@@ -3652,6 +6685,21 @@
           <a:p>
             <a:r>
               <a:rPr lang="ko-KR" altLang="en-US" dirty="0"/>
+              <a:t>문제 </a:t>
+            </a:r>
+            <a:r>
+              <a:rPr lang="en-US" altLang="ko-KR" dirty="0"/>
+              <a:t>/</a:t>
+            </a:r>
+            <a:r>
+              <a:rPr lang="ko-KR" altLang="en-US" dirty="0"/>
+              <a:t> 난이도 정의</a:t>
+            </a:r>
+            <a:endParaRPr lang="en-US" altLang="ko-KR" dirty="0"/>
+          </a:p>
+          <a:p>
+            <a:r>
+              <a:rPr lang="ko-KR" altLang="en-US" dirty="0"/>
               <a:t>트랙 선정 및 트랙 리더 선정 </a:t>
             </a:r>
             <a:endParaRPr lang="en-US" altLang="ko-KR" dirty="0"/>
@@ -3659,9 +6707,12 @@
           <a:p>
             <a:r>
               <a:rPr lang="ko-KR" altLang="en-US" dirty="0"/>
-              <a:t>주차 별 회의록 담당자 선정</a:t>
-            </a:r>
-            <a:endParaRPr lang="en-US" altLang="ko-KR" dirty="0"/>
+              <a:t>주차 별 회의록 담당자 선정 </a:t>
+            </a:r>
+            <a:r>
+              <a:rPr lang="en-US" altLang="ko-KR" dirty="0"/>
+              <a:t>(at week 2)</a:t>
+            </a:r>
           </a:p>
           <a:p>
             <a:r>
@@ -3694,7 +6745,7 @@
           </a:p>
           <a:p>
             <a:r>
-              <a:rPr lang="ko-KR" altLang="en-US" dirty="0"/>
+              <a:rPr lang="ko-KR" altLang="en-US" b="1" dirty="0"/>
               <a:t>오늘의 목표</a:t>
             </a:r>
             <a:r>
@@ -3717,8 +6768,8 @@
           </a:p>
           <a:p>
             <a:r>
-              <a:rPr lang="ko-KR" altLang="en-US" dirty="0"/>
-              <a:t>다음 미팅 전 목표</a:t>
+              <a:rPr lang="en-US" altLang="ko-KR" b="1" dirty="0"/>
+              <a:t>HW</a:t>
             </a:r>
             <a:r>
               <a:rPr lang="en-US" altLang="ko-KR" dirty="0"/>
@@ -3754,6 +6805,920 @@
     <p:extLst>
       <p:ext uri="{BB962C8B-B14F-4D97-AF65-F5344CB8AC3E}">
         <p14:creationId xmlns:p14="http://schemas.microsoft.com/office/powerpoint/2010/main" val="1195664401"/>
+      </p:ext>
+    </p:extLst>
+  </p:cSld>
+  <p:clrMapOvr>
+    <a:masterClrMapping/>
+  </p:clrMapOvr>
+</p:sld>
+</file>
+
+<file path=ppt/slides/slide20.xml><?xml version="1.0" encoding="utf-8"?>
+<p:sld xmlns:a="http://schemas.openxmlformats.org/drawingml/2006/main" xmlns:r="http://schemas.openxmlformats.org/officeDocument/2006/relationships" xmlns:p="http://schemas.openxmlformats.org/presentationml/2006/main">
+  <p:cSld>
+    <p:spTree>
+      <p:nvGrpSpPr>
+        <p:cNvPr id="1" name="">
+          <a:extLst>
+            <a:ext uri="{FF2B5EF4-FFF2-40B4-BE49-F238E27FC236}">
+              <a16:creationId xmlns:a16="http://schemas.microsoft.com/office/drawing/2014/main" id="{7216DE4D-DE32-24D0-96D3-D509087A8161}"/>
+            </a:ext>
+          </a:extLst>
+        </p:cNvPr>
+        <p:cNvGrpSpPr/>
+        <p:nvPr/>
+      </p:nvGrpSpPr>
+      <p:grpSpPr>
+        <a:xfrm>
+          <a:off x="0" y="0"/>
+          <a:ext cx="0" cy="0"/>
+          <a:chOff x="0" y="0"/>
+          <a:chExt cx="0" cy="0"/>
+        </a:xfrm>
+      </p:grpSpPr>
+      <p:sp>
+        <p:nvSpPr>
+          <p:cNvPr id="2" name="Title 1">
+            <a:extLst>
+              <a:ext uri="{FF2B5EF4-FFF2-40B4-BE49-F238E27FC236}">
+                <a16:creationId xmlns:a16="http://schemas.microsoft.com/office/drawing/2014/main" id="{B3C17833-8CB5-294B-D1EE-9423F4D69624}"/>
+              </a:ext>
+            </a:extLst>
+          </p:cNvPr>
+          <p:cNvSpPr>
+            <a:spLocks noGrp="1"/>
+          </p:cNvSpPr>
+          <p:nvPr>
+            <p:ph type="title"/>
+          </p:nvPr>
+        </p:nvSpPr>
+        <p:spPr/>
+        <p:txBody>
+          <a:bodyPr/>
+          <a:lstStyle/>
+          <a:p>
+            <a:pPr marL="0" lvl="0" indent="0">
+              <a:buNone/>
+            </a:pPr>
+            <a:r>
+              <a:rPr lang="ko-KR" altLang="en-US" dirty="0"/>
+              <a:t>트랙</a:t>
+            </a:r>
+            <a:endParaRPr dirty="0"/>
+          </a:p>
+        </p:txBody>
+      </p:sp>
+      <p:sp>
+        <p:nvSpPr>
+          <p:cNvPr id="7" name="TextBox 6">
+            <a:extLst>
+              <a:ext uri="{FF2B5EF4-FFF2-40B4-BE49-F238E27FC236}">
+                <a16:creationId xmlns:a16="http://schemas.microsoft.com/office/drawing/2014/main" id="{FD426830-5E28-60C0-F0BA-BF8598642523}"/>
+              </a:ext>
+            </a:extLst>
+          </p:cNvPr>
+          <p:cNvSpPr txBox="1"/>
+          <p:nvPr/>
+        </p:nvSpPr>
+        <p:spPr>
+          <a:xfrm>
+            <a:off x="838199" y="1690688"/>
+            <a:ext cx="10515599" cy="3970318"/>
+          </a:xfrm>
+          <a:prstGeom prst="rect">
+            <a:avLst/>
+          </a:prstGeom>
+          <a:noFill/>
+        </p:spPr>
+        <p:txBody>
+          <a:bodyPr wrap="square">
+            <a:spAutoFit/>
+          </a:bodyPr>
+          <a:lstStyle/>
+          <a:p>
+            <a:r>
+              <a:rPr lang="en-US" dirty="0"/>
+              <a:t>| Role | Name | </a:t>
+            </a:r>
+            <a:r>
+              <a:rPr lang="en-US" dirty="0" err="1"/>
+              <a:t>담당</a:t>
+            </a:r>
+            <a:r>
+              <a:rPr lang="en-US" dirty="0"/>
+              <a:t> |</a:t>
+            </a:r>
+          </a:p>
+          <a:p>
+            <a:r>
+              <a:rPr lang="en-US" dirty="0"/>
+              <a:t>| --- | --- | --- |</a:t>
+            </a:r>
+          </a:p>
+          <a:p>
+            <a:r>
+              <a:rPr lang="en-US" dirty="0"/>
+              <a:t>| Builder | [@</a:t>
+            </a:r>
+            <a:r>
+              <a:rPr lang="en-US" dirty="0" err="1"/>
+              <a:t>ybaeus</a:t>
+            </a:r>
+            <a:r>
+              <a:rPr lang="en-US" dirty="0"/>
+              <a:t>](https://</a:t>
+            </a:r>
+            <a:r>
+              <a:rPr lang="en-US" dirty="0" err="1"/>
+              <a:t>github.com</a:t>
+            </a:r>
+            <a:r>
+              <a:rPr lang="en-US" dirty="0"/>
+              <a:t>/</a:t>
+            </a:r>
+            <a:r>
+              <a:rPr lang="en-US" dirty="0" err="1"/>
+              <a:t>ybaeus</a:t>
+            </a:r>
+            <a:r>
+              <a:rPr lang="en-US" dirty="0"/>
+              <a:t>) | </a:t>
+            </a:r>
+            <a:r>
+              <a:rPr lang="en-US" dirty="0" err="1"/>
+              <a:t>프로젝트</a:t>
+            </a:r>
+            <a:r>
+              <a:rPr lang="en-US" dirty="0"/>
+              <a:t> </a:t>
+            </a:r>
+            <a:r>
+              <a:rPr lang="en-US" dirty="0" err="1"/>
+              <a:t>리딩</a:t>
+            </a:r>
+            <a:r>
+              <a:rPr lang="en-US" dirty="0"/>
+              <a:t>, ML</a:t>
+            </a:r>
+            <a:r>
+              <a:rPr lang="ko-KR" altLang="en-US" dirty="0"/>
+              <a:t>과 보정</a:t>
+            </a:r>
+            <a:r>
+              <a:rPr lang="en-US" dirty="0"/>
+              <a:t>|</a:t>
+            </a:r>
+          </a:p>
+          <a:p>
+            <a:r>
+              <a:rPr lang="en-US" dirty="0"/>
+              <a:t>| Runner | </a:t>
+            </a:r>
+            <a:r>
+              <a:rPr lang="en-US" dirty="0" err="1"/>
+              <a:t>하민주</a:t>
+            </a:r>
+            <a:r>
+              <a:rPr lang="en-US" dirty="0"/>
+              <a:t> | </a:t>
+            </a:r>
+            <a:r>
+              <a:rPr lang="en-US" dirty="0" err="1"/>
+              <a:t>ML과</a:t>
+            </a:r>
+            <a:r>
+              <a:rPr lang="en-US" dirty="0"/>
+              <a:t> </a:t>
+            </a:r>
+            <a:r>
+              <a:rPr lang="en-US" dirty="0" err="1"/>
+              <a:t>보정</a:t>
+            </a:r>
+            <a:r>
+              <a:rPr lang="en-US" dirty="0"/>
+              <a:t> |</a:t>
+            </a:r>
+          </a:p>
+          <a:p>
+            <a:r>
+              <a:rPr lang="en-US" dirty="0"/>
+              <a:t>| Runner | </a:t>
+            </a:r>
+            <a:r>
+              <a:rPr lang="en-US" dirty="0" err="1"/>
+              <a:t>최호재</a:t>
+            </a:r>
+            <a:r>
+              <a:rPr lang="en-US" dirty="0"/>
+              <a:t> | </a:t>
+            </a:r>
+            <a:r>
+              <a:rPr lang="en-US" dirty="0" err="1"/>
+              <a:t>ML과</a:t>
+            </a:r>
+            <a:r>
+              <a:rPr lang="en-US" dirty="0"/>
+              <a:t> </a:t>
+            </a:r>
+            <a:r>
+              <a:rPr lang="en-US" dirty="0" err="1"/>
+              <a:t>보정</a:t>
+            </a:r>
+            <a:r>
+              <a:rPr lang="en-US" dirty="0"/>
+              <a:t> |</a:t>
+            </a:r>
+          </a:p>
+          <a:p>
+            <a:r>
+              <a:rPr lang="en-US" dirty="0"/>
+              <a:t>| Runner | </a:t>
+            </a:r>
+            <a:r>
+              <a:rPr lang="en-US" dirty="0" err="1"/>
+              <a:t>박소정</a:t>
+            </a:r>
+            <a:r>
+              <a:rPr lang="en-US" dirty="0"/>
+              <a:t> | </a:t>
+            </a:r>
+            <a:r>
+              <a:rPr lang="en-US" dirty="0" err="1"/>
+              <a:t>ML과</a:t>
+            </a:r>
+            <a:r>
+              <a:rPr lang="en-US" dirty="0"/>
+              <a:t> </a:t>
+            </a:r>
+            <a:r>
+              <a:rPr lang="en-US" dirty="0" err="1"/>
+              <a:t>보정</a:t>
+            </a:r>
+            <a:r>
+              <a:rPr lang="en-US" dirty="0"/>
+              <a:t> |</a:t>
+            </a:r>
+          </a:p>
+          <a:p>
+            <a:r>
+              <a:rPr lang="en-US" dirty="0"/>
+              <a:t>| Runner | </a:t>
+            </a:r>
+            <a:r>
+              <a:rPr lang="en-US" dirty="0" err="1"/>
+              <a:t>김태엽</a:t>
+            </a:r>
+            <a:r>
+              <a:rPr lang="en-US" dirty="0"/>
+              <a:t> | </a:t>
+            </a:r>
+            <a:r>
+              <a:rPr lang="en-US" dirty="0" err="1"/>
+              <a:t>에이전트와</a:t>
+            </a:r>
+            <a:r>
+              <a:rPr lang="en-US" dirty="0"/>
+              <a:t> </a:t>
+            </a:r>
+            <a:r>
+              <a:rPr lang="en-US" dirty="0" err="1"/>
+              <a:t>교란</a:t>
+            </a:r>
+            <a:r>
+              <a:rPr lang="en-US" dirty="0"/>
+              <a:t> </a:t>
+            </a:r>
+            <a:r>
+              <a:rPr lang="en-US" dirty="0" err="1"/>
+              <a:t>감사</a:t>
+            </a:r>
+            <a:r>
+              <a:rPr lang="en-US" dirty="0"/>
+              <a:t> |</a:t>
+            </a:r>
+          </a:p>
+          <a:p>
+            <a:r>
+              <a:rPr lang="en-US" dirty="0"/>
+              <a:t>| Runner | </a:t>
+            </a:r>
+            <a:r>
+              <a:rPr lang="en-US" dirty="0" err="1"/>
+              <a:t>서동영</a:t>
+            </a:r>
+            <a:r>
+              <a:rPr lang="en-US" dirty="0"/>
+              <a:t> | </a:t>
+            </a:r>
+            <a:r>
+              <a:rPr lang="en-US" dirty="0" err="1"/>
+              <a:t>에이전트와</a:t>
+            </a:r>
+            <a:r>
+              <a:rPr lang="en-US" dirty="0"/>
+              <a:t> </a:t>
+            </a:r>
+            <a:r>
+              <a:rPr lang="en-US" dirty="0" err="1"/>
+              <a:t>교란</a:t>
+            </a:r>
+            <a:r>
+              <a:rPr lang="en-US" dirty="0"/>
+              <a:t> </a:t>
+            </a:r>
+            <a:r>
+              <a:rPr lang="en-US" dirty="0" err="1"/>
+              <a:t>감사</a:t>
+            </a:r>
+            <a:r>
+              <a:rPr lang="en-US" dirty="0"/>
+              <a:t> |</a:t>
+            </a:r>
+          </a:p>
+          <a:p>
+            <a:r>
+              <a:rPr lang="en-US" dirty="0"/>
+              <a:t>| Runner | </a:t>
+            </a:r>
+            <a:r>
+              <a:rPr lang="en-US" dirty="0" err="1"/>
+              <a:t>차재민</a:t>
+            </a:r>
+            <a:r>
+              <a:rPr lang="en-US" dirty="0"/>
+              <a:t> | </a:t>
+            </a:r>
+            <a:r>
+              <a:rPr lang="en-US" dirty="0" err="1"/>
+              <a:t>에이전트와</a:t>
+            </a:r>
+            <a:r>
+              <a:rPr lang="en-US" dirty="0"/>
+              <a:t> </a:t>
+            </a:r>
+            <a:r>
+              <a:rPr lang="en-US" dirty="0" err="1"/>
+              <a:t>교란</a:t>
+            </a:r>
+            <a:r>
+              <a:rPr lang="en-US" dirty="0"/>
+              <a:t> </a:t>
+            </a:r>
+            <a:r>
+              <a:rPr lang="en-US" dirty="0" err="1"/>
+              <a:t>감사</a:t>
+            </a:r>
+            <a:r>
+              <a:rPr lang="en-US" dirty="0"/>
+              <a:t> |</a:t>
+            </a:r>
+          </a:p>
+          <a:p>
+            <a:r>
+              <a:rPr lang="en-US" dirty="0"/>
+              <a:t>| Runner | </a:t>
+            </a:r>
+            <a:r>
+              <a:rPr lang="en-US" dirty="0" err="1"/>
+              <a:t>정재훈</a:t>
+            </a:r>
+            <a:r>
+              <a:rPr lang="en-US" dirty="0"/>
+              <a:t> | </a:t>
+            </a:r>
+            <a:r>
+              <a:rPr lang="en-US" dirty="0" err="1"/>
+              <a:t>에이전트와</a:t>
+            </a:r>
+            <a:r>
+              <a:rPr lang="en-US" dirty="0"/>
+              <a:t> </a:t>
+            </a:r>
+            <a:r>
+              <a:rPr lang="en-US" dirty="0" err="1"/>
+              <a:t>교란</a:t>
+            </a:r>
+            <a:r>
+              <a:rPr lang="en-US" dirty="0"/>
+              <a:t> </a:t>
+            </a:r>
+            <a:r>
+              <a:rPr lang="en-US" dirty="0" err="1"/>
+              <a:t>감사</a:t>
+            </a:r>
+            <a:r>
+              <a:rPr lang="en-US" dirty="0"/>
+              <a:t> |</a:t>
+            </a:r>
+          </a:p>
+          <a:p>
+            <a:r>
+              <a:rPr lang="en-US" dirty="0"/>
+              <a:t>| Runner | </a:t>
+            </a:r>
+            <a:r>
+              <a:rPr lang="en-US" dirty="0" err="1"/>
+              <a:t>권예진</a:t>
+            </a:r>
+            <a:r>
+              <a:rPr lang="en-US" dirty="0"/>
+              <a:t> | </a:t>
+            </a:r>
+            <a:r>
+              <a:rPr lang="en-US" dirty="0" err="1"/>
+              <a:t>난이도</a:t>
+            </a:r>
+            <a:r>
+              <a:rPr lang="en-US" dirty="0"/>
+              <a:t> </a:t>
+            </a:r>
+            <a:r>
+              <a:rPr lang="en-US" dirty="0" err="1"/>
+              <a:t>좌표</a:t>
+            </a:r>
+            <a:r>
+              <a:rPr lang="en-US" dirty="0"/>
+              <a:t> </a:t>
+            </a:r>
+            <a:r>
+              <a:rPr lang="en-US" dirty="0" err="1"/>
+              <a:t>큐레이션</a:t>
+            </a:r>
+            <a:r>
+              <a:rPr lang="en-US" dirty="0"/>
+              <a:t> |</a:t>
+            </a:r>
+          </a:p>
+          <a:p>
+            <a:r>
+              <a:rPr lang="en-US" dirty="0"/>
+              <a:t>| Runner | </a:t>
+            </a:r>
+            <a:r>
+              <a:rPr lang="en-US" dirty="0" err="1"/>
+              <a:t>김시은</a:t>
+            </a:r>
+            <a:r>
+              <a:rPr lang="en-US" dirty="0"/>
+              <a:t> | </a:t>
+            </a:r>
+            <a:r>
+              <a:rPr lang="en-US" dirty="0" err="1"/>
+              <a:t>난이도</a:t>
+            </a:r>
+            <a:r>
+              <a:rPr lang="en-US" dirty="0"/>
+              <a:t> </a:t>
+            </a:r>
+            <a:r>
+              <a:rPr lang="en-US" dirty="0" err="1"/>
+              <a:t>좌표</a:t>
+            </a:r>
+            <a:r>
+              <a:rPr lang="en-US" dirty="0"/>
+              <a:t> </a:t>
+            </a:r>
+            <a:r>
+              <a:rPr lang="en-US" dirty="0" err="1"/>
+              <a:t>큐레이션</a:t>
+            </a:r>
+            <a:r>
+              <a:rPr lang="en-US" dirty="0"/>
+              <a:t> |</a:t>
+            </a:r>
+          </a:p>
+          <a:p>
+            <a:r>
+              <a:rPr lang="en-US" dirty="0"/>
+              <a:t>| Runner | </a:t>
+            </a:r>
+            <a:r>
+              <a:rPr lang="en-US" dirty="0" err="1"/>
+              <a:t>이성주</a:t>
+            </a:r>
+            <a:r>
+              <a:rPr lang="en-US" dirty="0"/>
+              <a:t> | </a:t>
+            </a:r>
+            <a:r>
+              <a:rPr lang="en-US" dirty="0" err="1"/>
+              <a:t>난이도</a:t>
+            </a:r>
+            <a:r>
+              <a:rPr lang="en-US" dirty="0"/>
+              <a:t> </a:t>
+            </a:r>
+            <a:r>
+              <a:rPr lang="en-US" dirty="0" err="1"/>
+              <a:t>좌표</a:t>
+            </a:r>
+            <a:r>
+              <a:rPr lang="en-US" dirty="0"/>
+              <a:t> </a:t>
+            </a:r>
+            <a:r>
+              <a:rPr lang="en-US" dirty="0" err="1"/>
+              <a:t>큐레이션</a:t>
+            </a:r>
+            <a:r>
+              <a:rPr lang="en-US" dirty="0"/>
+              <a:t> |</a:t>
+            </a:r>
+          </a:p>
+          <a:p>
+            <a:r>
+              <a:rPr lang="en-US" dirty="0"/>
+              <a:t>| Runner | </a:t>
+            </a:r>
+            <a:r>
+              <a:rPr lang="en-US" dirty="0" err="1"/>
+              <a:t>전소연</a:t>
+            </a:r>
+            <a:r>
+              <a:rPr lang="en-US" dirty="0"/>
+              <a:t> | </a:t>
+            </a:r>
+            <a:r>
+              <a:rPr lang="en-US" dirty="0" err="1"/>
+              <a:t>난이도</a:t>
+            </a:r>
+            <a:r>
+              <a:rPr lang="en-US" dirty="0"/>
+              <a:t> </a:t>
+            </a:r>
+            <a:r>
+              <a:rPr lang="en-US" dirty="0" err="1"/>
+              <a:t>좌표</a:t>
+            </a:r>
+            <a:r>
+              <a:rPr lang="en-US" dirty="0"/>
+              <a:t> </a:t>
+            </a:r>
+            <a:r>
+              <a:rPr lang="en-US" dirty="0" err="1"/>
+              <a:t>큐레이션</a:t>
+            </a:r>
+            <a:r>
+              <a:rPr lang="en-US" dirty="0"/>
+              <a:t> |</a:t>
+            </a:r>
+          </a:p>
+        </p:txBody>
+      </p:sp>
+    </p:spTree>
+    <p:extLst>
+      <p:ext uri="{BB962C8B-B14F-4D97-AF65-F5344CB8AC3E}">
+        <p14:creationId xmlns:p14="http://schemas.microsoft.com/office/powerpoint/2010/main" val="3428342318"/>
+      </p:ext>
+    </p:extLst>
+  </p:cSld>
+  <p:clrMapOvr>
+    <a:masterClrMapping/>
+  </p:clrMapOvr>
+</p:sld>
+</file>
+
+<file path=ppt/slides/slide21.xml><?xml version="1.0" encoding="utf-8"?>
+<p:sld xmlns:a="http://schemas.openxmlformats.org/drawingml/2006/main" xmlns:r="http://schemas.openxmlformats.org/officeDocument/2006/relationships" xmlns:p="http://schemas.openxmlformats.org/presentationml/2006/main">
+  <p:cSld>
+    <p:spTree>
+      <p:nvGrpSpPr>
+        <p:cNvPr id="1" name="">
+          <a:extLst>
+            <a:ext uri="{FF2B5EF4-FFF2-40B4-BE49-F238E27FC236}">
+              <a16:creationId xmlns:a16="http://schemas.microsoft.com/office/drawing/2014/main" id="{528C61DD-C077-90AC-393D-47C4A380ABDA}"/>
+            </a:ext>
+          </a:extLst>
+        </p:cNvPr>
+        <p:cNvGrpSpPr/>
+        <p:nvPr/>
+      </p:nvGrpSpPr>
+      <p:grpSpPr>
+        <a:xfrm>
+          <a:off x="0" y="0"/>
+          <a:ext cx="0" cy="0"/>
+          <a:chOff x="0" y="0"/>
+          <a:chExt cx="0" cy="0"/>
+        </a:xfrm>
+      </p:grpSpPr>
+      <p:sp>
+        <p:nvSpPr>
+          <p:cNvPr id="2" name="Title 1">
+            <a:extLst>
+              <a:ext uri="{FF2B5EF4-FFF2-40B4-BE49-F238E27FC236}">
+                <a16:creationId xmlns:a16="http://schemas.microsoft.com/office/drawing/2014/main" id="{F270F85C-EB9C-1CF2-F2E5-2CB9F64B2FB6}"/>
+              </a:ext>
+            </a:extLst>
+          </p:cNvPr>
+          <p:cNvSpPr>
+            <a:spLocks noGrp="1"/>
+          </p:cNvSpPr>
+          <p:nvPr>
+            <p:ph type="title"/>
+          </p:nvPr>
+        </p:nvSpPr>
+        <p:spPr>
+          <a:xfrm>
+            <a:off x="831850" y="1709738"/>
+            <a:ext cx="10515600" cy="2852737"/>
+          </a:xfrm>
+        </p:spPr>
+        <p:txBody>
+          <a:bodyPr/>
+          <a:lstStyle/>
+          <a:p>
+            <a:pPr marL="0" lvl="0" indent="0">
+              <a:buNone/>
+            </a:pPr>
+            <a:r>
+              <a:rPr lang="ko-KR" altLang="en-US" dirty="0"/>
+              <a:t>트랙 리더 선정</a:t>
+            </a:r>
+            <a:r>
+              <a:rPr lang="en-US" altLang="ko-KR" dirty="0"/>
+              <a:t> + </a:t>
+            </a:r>
+            <a:r>
+              <a:rPr lang="ko-KR" altLang="en-US" dirty="0"/>
+              <a:t>활동</a:t>
+            </a:r>
+            <a:endParaRPr dirty="0"/>
+          </a:p>
+        </p:txBody>
+      </p:sp>
+    </p:spTree>
+    <p:extLst>
+      <p:ext uri="{BB962C8B-B14F-4D97-AF65-F5344CB8AC3E}">
+        <p14:creationId xmlns:p14="http://schemas.microsoft.com/office/powerpoint/2010/main" val="2155931474"/>
+      </p:ext>
+    </p:extLst>
+  </p:cSld>
+  <p:clrMapOvr>
+    <a:masterClrMapping/>
+  </p:clrMapOvr>
+</p:sld>
+</file>
+
+<file path=ppt/slides/slide22.xml><?xml version="1.0" encoding="utf-8"?>
+<p:sld xmlns:a="http://schemas.openxmlformats.org/drawingml/2006/main" xmlns:r="http://schemas.openxmlformats.org/officeDocument/2006/relationships" xmlns:p="http://schemas.openxmlformats.org/presentationml/2006/main">
+  <p:cSld>
+    <p:spTree>
+      <p:nvGrpSpPr>
+        <p:cNvPr id="1" name=""/>
+        <p:cNvGrpSpPr/>
+        <p:nvPr/>
+      </p:nvGrpSpPr>
+      <p:grpSpPr>
+        <a:xfrm>
+          <a:off x="0" y="0"/>
+          <a:ext cx="0" cy="0"/>
+          <a:chOff x="0" y="0"/>
+          <a:chExt cx="0" cy="0"/>
+        </a:xfrm>
+      </p:grpSpPr>
+      <p:sp>
+        <p:nvSpPr>
+          <p:cNvPr id="2" name="Title 1">
+            <a:extLst>
+              <a:ext uri="{FF2B5EF4-FFF2-40B4-BE49-F238E27FC236}">
+                <a16:creationId xmlns:a16="http://schemas.microsoft.com/office/drawing/2014/main" id="{A6F38C4D-1413-86AF-C839-EB908BDEAD0B}"/>
+              </a:ext>
+            </a:extLst>
+          </p:cNvPr>
+          <p:cNvSpPr>
+            <a:spLocks noGrp="1"/>
+          </p:cNvSpPr>
+          <p:nvPr>
+            <p:ph type="title"/>
+          </p:nvPr>
+        </p:nvSpPr>
+        <p:spPr/>
+        <p:txBody>
+          <a:bodyPr/>
+          <a:lstStyle/>
+          <a:p>
+            <a:r>
+              <a:rPr lang="en-US" dirty="0"/>
+              <a:t>PR </a:t>
+            </a:r>
+            <a:r>
+              <a:rPr lang="ko-KR" altLang="en-US" dirty="0"/>
+              <a:t>올리기 </a:t>
+            </a:r>
+            <a:endParaRPr lang="en-US" dirty="0"/>
+          </a:p>
+        </p:txBody>
+      </p:sp>
+      <p:sp>
+        <p:nvSpPr>
+          <p:cNvPr id="3" name="Content Placeholder 2">
+            <a:extLst>
+              <a:ext uri="{FF2B5EF4-FFF2-40B4-BE49-F238E27FC236}">
+                <a16:creationId xmlns:a16="http://schemas.microsoft.com/office/drawing/2014/main" id="{BC87AD51-0F9E-503D-3B0F-AD0D22C8B580}"/>
+              </a:ext>
+            </a:extLst>
+          </p:cNvPr>
+          <p:cNvSpPr>
+            <a:spLocks noGrp="1"/>
+          </p:cNvSpPr>
+          <p:nvPr>
+            <p:ph idx="1"/>
+          </p:nvPr>
+        </p:nvSpPr>
+        <p:spPr/>
+        <p:txBody>
+          <a:bodyPr/>
+          <a:lstStyle/>
+          <a:p>
+            <a:r>
+              <a:rPr lang="en-US" dirty="0">
+                <a:hlinkClick r:id="rId2"/>
+              </a:rPr>
+              <a:t>https://github.com/Pseudo-Lab/abstain-dti</a:t>
+            </a:r>
+            <a:endParaRPr lang="en-US" dirty="0"/>
+          </a:p>
+          <a:p>
+            <a:pPr lvl="1"/>
+            <a:r>
+              <a:rPr lang="ko-KR" altLang="en-US" dirty="0"/>
+              <a:t>자기 트랙</a:t>
+            </a:r>
+            <a:r>
+              <a:rPr lang="en-US" altLang="ko-KR" dirty="0"/>
+              <a:t> branch </a:t>
+            </a:r>
+            <a:r>
+              <a:rPr lang="ko-KR" altLang="en-US" dirty="0"/>
+              <a:t>사용 </a:t>
+            </a:r>
+            <a:r>
+              <a:rPr lang="en-US" altLang="ko-KR" dirty="0"/>
+              <a:t>-&gt;</a:t>
+            </a:r>
+            <a:r>
+              <a:rPr lang="ko-KR" altLang="en-US" dirty="0"/>
+              <a:t> </a:t>
+            </a:r>
+            <a:r>
+              <a:rPr lang="en-US" altLang="ko-KR" dirty="0"/>
+              <a:t>dev</a:t>
+            </a:r>
+            <a:r>
+              <a:rPr lang="ko-KR" altLang="en-US" dirty="0"/>
+              <a:t> 로 </a:t>
+            </a:r>
+            <a:r>
+              <a:rPr lang="en-US" altLang="ko-KR" dirty="0"/>
+              <a:t>PR (at least one reviewer) </a:t>
+            </a:r>
+            <a:endParaRPr lang="en-US" dirty="0"/>
+          </a:p>
+          <a:p>
+            <a:r>
+              <a:rPr lang="en-US" dirty="0" err="1"/>
+              <a:t>REAMD.md</a:t>
+            </a:r>
+            <a:r>
+              <a:rPr lang="en-US" dirty="0"/>
+              <a:t> </a:t>
+            </a:r>
+            <a:r>
+              <a:rPr lang="ko-KR" altLang="en-US" dirty="0"/>
+              <a:t>팀 테이블 이름에 </a:t>
+            </a:r>
+            <a:r>
+              <a:rPr lang="ko-KR" altLang="en-US" dirty="0" err="1"/>
+              <a:t>깃헙</a:t>
+            </a:r>
+            <a:r>
+              <a:rPr lang="ko-KR" altLang="en-US" dirty="0"/>
+              <a:t> 링크 언급 </a:t>
+            </a:r>
+            <a:endParaRPr lang="en-US" altLang="ko-KR" dirty="0"/>
+          </a:p>
+          <a:p>
+            <a:r>
+              <a:rPr lang="en-US" altLang="ko-KR" dirty="0"/>
+              <a:t>HW: </a:t>
+            </a:r>
+            <a:r>
+              <a:rPr lang="ko-KR" altLang="en-US" dirty="0"/>
+              <a:t>다음주 발표할 논문 올리기 </a:t>
+            </a:r>
+            <a:endParaRPr lang="en-US" altLang="ko-KR" dirty="0"/>
+          </a:p>
+          <a:p>
+            <a:endParaRPr lang="en-US" altLang="ko-KR" dirty="0"/>
+          </a:p>
+          <a:p>
+            <a:pPr marL="0" indent="0">
+              <a:buNone/>
+            </a:pPr>
+            <a:r>
+              <a:rPr lang="ko-KR" altLang="en-US" dirty="0"/>
+              <a:t>*논문 </a:t>
+            </a:r>
+            <a:r>
+              <a:rPr lang="en-US" altLang="ko-KR" dirty="0"/>
+              <a:t>-&gt;</a:t>
+            </a:r>
+            <a:r>
+              <a:rPr lang="ko-KR" altLang="en-US" dirty="0"/>
+              <a:t> 실행 </a:t>
+            </a:r>
+            <a:r>
+              <a:rPr lang="en-US" altLang="ko-KR" dirty="0">
+                <a:hlinkClick r:id="rId3"/>
+              </a:rPr>
+              <a:t>https://github.com/ybaeus/Paper2Agent</a:t>
+            </a:r>
+            <a:r>
+              <a:rPr lang="ko-KR" altLang="en-US" dirty="0"/>
+              <a:t> </a:t>
+            </a:r>
+            <a:endParaRPr lang="en-US" dirty="0"/>
+          </a:p>
+        </p:txBody>
+      </p:sp>
+    </p:spTree>
+    <p:extLst>
+      <p:ext uri="{BB962C8B-B14F-4D97-AF65-F5344CB8AC3E}">
+        <p14:creationId xmlns:p14="http://schemas.microsoft.com/office/powerpoint/2010/main" val="1369553910"/>
+      </p:ext>
+    </p:extLst>
+  </p:cSld>
+  <p:clrMapOvr>
+    <a:masterClrMapping/>
+  </p:clrMapOvr>
+</p:sld>
+</file>
+
+<file path=ppt/slides/slide23.xml><?xml version="1.0" encoding="utf-8"?>
+<p:sld xmlns:a="http://schemas.openxmlformats.org/drawingml/2006/main" xmlns:r="http://schemas.openxmlformats.org/officeDocument/2006/relationships" xmlns:p="http://schemas.openxmlformats.org/presentationml/2006/main">
+  <p:cSld>
+    <p:spTree>
+      <p:nvGrpSpPr>
+        <p:cNvPr id="1" name="">
+          <a:extLst>
+            <a:ext uri="{FF2B5EF4-FFF2-40B4-BE49-F238E27FC236}">
+              <a16:creationId xmlns:a16="http://schemas.microsoft.com/office/drawing/2014/main" id="{5269C280-0404-E4D3-3207-DCE4652FE0AE}"/>
+            </a:ext>
+          </a:extLst>
+        </p:cNvPr>
+        <p:cNvGrpSpPr/>
+        <p:nvPr/>
+      </p:nvGrpSpPr>
+      <p:grpSpPr>
+        <a:xfrm>
+          <a:off x="0" y="0"/>
+          <a:ext cx="0" cy="0"/>
+          <a:chOff x="0" y="0"/>
+          <a:chExt cx="0" cy="0"/>
+        </a:xfrm>
+      </p:grpSpPr>
+      <p:sp>
+        <p:nvSpPr>
+          <p:cNvPr id="2" name="Title 1">
+            <a:extLst>
+              <a:ext uri="{FF2B5EF4-FFF2-40B4-BE49-F238E27FC236}">
+                <a16:creationId xmlns:a16="http://schemas.microsoft.com/office/drawing/2014/main" id="{4D40CF54-B0B2-8781-F2F1-20B96EDD16AD}"/>
+              </a:ext>
+            </a:extLst>
+          </p:cNvPr>
+          <p:cNvSpPr>
+            <a:spLocks noGrp="1"/>
+          </p:cNvSpPr>
+          <p:nvPr>
+            <p:ph type="title"/>
+          </p:nvPr>
+        </p:nvSpPr>
+        <p:spPr>
+          <a:xfrm>
+            <a:off x="831850" y="1709738"/>
+            <a:ext cx="10515600" cy="2852737"/>
+          </a:xfrm>
+        </p:spPr>
+        <p:txBody>
+          <a:bodyPr/>
+          <a:lstStyle/>
+          <a:p>
+            <a:pPr marL="0" lvl="0" indent="0">
+              <a:buNone/>
+            </a:pPr>
+            <a:r>
+              <a:rPr lang="en-US" dirty="0"/>
+              <a:t>Thank you! </a:t>
+            </a:r>
+            <a:endParaRPr dirty="0"/>
+          </a:p>
+        </p:txBody>
+      </p:sp>
+    </p:spTree>
+    <p:extLst>
+      <p:ext uri="{BB962C8B-B14F-4D97-AF65-F5344CB8AC3E}">
+        <p14:creationId xmlns:p14="http://schemas.microsoft.com/office/powerpoint/2010/main" val="3970544445"/>
       </p:ext>
     </p:extLst>
   </p:cSld>
@@ -3836,15 +7801,7 @@
             </a:r>
             <a:r>
               <a:rPr lang="ko-KR" altLang="en-US" dirty="0"/>
-              <a:t>회 이상 무단 </a:t>
-            </a:r>
-            <a:r>
-              <a:rPr lang="ko-KR" altLang="en-US" dirty="0" err="1"/>
-              <a:t>불참시</a:t>
-            </a:r>
-            <a:r>
-              <a:rPr lang="ko-KR" altLang="en-US" dirty="0"/>
-              <a:t> 제명</a:t>
+              <a:t>회 이상 무단 불참 시 제명</a:t>
             </a:r>
             <a:endParaRPr lang="en-US" altLang="ko-KR" dirty="0"/>
           </a:p>
@@ -3867,11 +7824,19 @@
             </a:r>
             <a:r>
               <a:rPr lang="ko-KR" altLang="en-US" dirty="0"/>
-              <a:t>얼굴이 보이지 않아도 댐</a:t>
+              <a:t>얼굴이 보이지 않아도</a:t>
             </a:r>
             <a:r>
               <a:rPr lang="en-US" altLang="ko-KR" dirty="0"/>
-              <a:t>)</a:t>
+              <a:t> </a:t>
+            </a:r>
+            <a:r>
+              <a:rPr lang="ko-KR" altLang="en-US" dirty="0"/>
+              <a:t>됩니다</a:t>
+            </a:r>
+            <a:r>
+              <a:rPr lang="en-US" altLang="ko-KR" dirty="0"/>
+              <a:t>.)</a:t>
             </a:r>
             <a:r>
               <a:rPr lang="ko-KR" altLang="en-US" dirty="0"/>
@@ -3916,7 +7881,7 @@
           <p:cNvPr id="2" name="Title 1">
             <a:extLst>
               <a:ext uri="{FF2B5EF4-FFF2-40B4-BE49-F238E27FC236}">
-                <a16:creationId xmlns:a16="http://schemas.microsoft.com/office/drawing/2014/main" id="{CF18FD51-D271-CC29-DFD3-C661246FCE2D}"/>
+                <a16:creationId xmlns:a16="http://schemas.microsoft.com/office/drawing/2014/main" id="{85566A82-5E82-FBC2-17E3-E88F3314CA6D}"/>
               </a:ext>
             </a:extLst>
           </p:cNvPr>
@@ -3933,9 +7898,10 @@
           <a:lstStyle/>
           <a:p>
             <a:r>
-              <a:rPr lang="en-US" dirty="0"/>
-              <a:t>Ice breaking</a:t>
-            </a:r>
+              <a:rPr lang="ko-KR" altLang="en-US" dirty="0"/>
+              <a:t>자기 소개</a:t>
+            </a:r>
+            <a:endParaRPr lang="en-US" dirty="0"/>
           </a:p>
         </p:txBody>
       </p:sp>
@@ -3944,7 +7910,7 @@
           <p:cNvPr id="3" name="Content Placeholder 2">
             <a:extLst>
               <a:ext uri="{FF2B5EF4-FFF2-40B4-BE49-F238E27FC236}">
-                <a16:creationId xmlns:a16="http://schemas.microsoft.com/office/drawing/2014/main" id="{24A38554-BFA0-E53D-2E7F-CFC05DC07FEE}"/>
+                <a16:creationId xmlns:a16="http://schemas.microsoft.com/office/drawing/2014/main" id="{DFE3F890-37F7-0B6D-6D54-D1BC05115F99}"/>
               </a:ext>
             </a:extLst>
           </p:cNvPr>
@@ -3960,14 +7926,56 @@
           <a:bodyPr/>
           <a:lstStyle/>
           <a:p>
-            <a:endParaRPr lang="en-US"/>
+            <a:pPr marL="0" indent="0">
+              <a:buNone/>
+            </a:pPr>
+            <a:r>
+              <a:rPr lang="en-US" b="1" dirty="0"/>
+              <a:t>Yeji Bae</a:t>
+            </a:r>
+          </a:p>
+          <a:p>
+            <a:pPr marL="0" indent="0">
+              <a:buNone/>
+            </a:pPr>
+            <a:r>
+              <a:rPr lang="en-US" dirty="0"/>
+              <a:t>Data Scientist / Computational Biologist at Seattle Children’s Hospital &amp; Research Institute </a:t>
+            </a:r>
+          </a:p>
+          <a:p>
+            <a:pPr marL="0" indent="0">
+              <a:buNone/>
+            </a:pPr>
+            <a:endParaRPr lang="en-US" dirty="0"/>
+          </a:p>
+          <a:p>
+            <a:pPr lvl="1"/>
+            <a:r>
+              <a:rPr lang="en-US" dirty="0"/>
+              <a:t>Multi-omics Analysis</a:t>
+            </a:r>
+          </a:p>
+          <a:p>
+            <a:pPr lvl="1"/>
+            <a:r>
+              <a:rPr lang="en-US" dirty="0"/>
+              <a:t>DL model development (fine tuning) </a:t>
+            </a:r>
+          </a:p>
+          <a:p>
+            <a:pPr lvl="1"/>
+            <a:r>
+              <a:rPr lang="en-US" dirty="0"/>
+              <a:t>Agent Engineering</a:t>
+            </a:r>
           </a:p>
         </p:txBody>
       </p:sp>
     </p:spTree>
     <p:extLst>
       <p:ext uri="{BB962C8B-B14F-4D97-AF65-F5344CB8AC3E}">
-        <p14:creationId xmlns:p14="http://schemas.microsoft.com/office/powerpoint/2010/main" val="586105943"/>
+        <p14:creationId xmlns:p14="http://schemas.microsoft.com/office/powerpoint/2010/main" val="187116585"/>
       </p:ext>
     </p:extLst>
   </p:cSld>
@@ -3999,7 +8007,7 @@
           <p:cNvPr id="2" name="Title 1">
             <a:extLst>
               <a:ext uri="{FF2B5EF4-FFF2-40B4-BE49-F238E27FC236}">
-                <a16:creationId xmlns:a16="http://schemas.microsoft.com/office/drawing/2014/main" id="{85566A82-5E82-FBC2-17E3-E88F3314CA6D}"/>
+                <a16:creationId xmlns:a16="http://schemas.microsoft.com/office/drawing/2014/main" id="{7C89F797-FF60-325F-5DF3-1A6344DE1DEC}"/>
               </a:ext>
             </a:extLst>
           </p:cNvPr>
@@ -4016,8 +8024,20 @@
           <a:lstStyle/>
           <a:p>
             <a:r>
+              <a:rPr lang="en-US" dirty="0"/>
+              <a:t>Abstain-DTI </a:t>
+            </a:r>
+            <a:r>
+              <a:rPr lang="ko-KR" altLang="en-US" dirty="0" err="1"/>
+              <a:t>를</a:t>
+            </a:r>
+            <a:r>
               <a:rPr lang="ko-KR" altLang="en-US" dirty="0"/>
-              <a:t>자기 소개</a:t>
+              <a:t> 위한 </a:t>
+            </a:r>
+            <a:r>
+              <a:rPr lang="ko-KR" altLang="en-US" dirty="0" err="1"/>
+              <a:t>온보딩</a:t>
             </a:r>
             <a:endParaRPr lang="en-US" dirty="0"/>
           </a:p>
@@ -4028,7 +8048,7 @@
           <p:cNvPr id="3" name="Content Placeholder 2">
             <a:extLst>
               <a:ext uri="{FF2B5EF4-FFF2-40B4-BE49-F238E27FC236}">
-                <a16:creationId xmlns:a16="http://schemas.microsoft.com/office/drawing/2014/main" id="{DFE3F890-37F7-0B6D-6D54-D1BC05115F99}"/>
+                <a16:creationId xmlns:a16="http://schemas.microsoft.com/office/drawing/2014/main" id="{9C5F5993-7D5F-43F6-F67A-2FD8FDE9D442}"/>
               </a:ext>
             </a:extLst>
           </p:cNvPr>
@@ -4045,43 +8065,36 @@
           <a:lstStyle/>
           <a:p>
             <a:r>
+              <a:rPr lang="ko-KR" altLang="en-US" dirty="0"/>
+              <a:t>문제 정의</a:t>
+            </a:r>
+            <a:endParaRPr lang="en-US" altLang="ko-KR" dirty="0"/>
+          </a:p>
+          <a:p>
+            <a:r>
+              <a:rPr lang="ko-KR" altLang="en-US" dirty="0"/>
+              <a:t>난이도 정의 </a:t>
+            </a:r>
+            <a:endParaRPr lang="en-US" altLang="ko-KR" dirty="0"/>
+          </a:p>
+          <a:p>
+            <a:r>
               <a:rPr lang="en-US" dirty="0"/>
-              <a:t>Yeji Bae</a:t>
-            </a:r>
-          </a:p>
-          <a:p>
-            <a:r>
-              <a:rPr lang="en-US" dirty="0"/>
-              <a:t>Data Scientist / Computational Biologist at Seattle Children’s Hospital &amp; Research Institute </a:t>
-            </a:r>
-          </a:p>
-          <a:p>
-            <a:pPr lvl="1"/>
-            <a:r>
-              <a:rPr lang="en-US" dirty="0"/>
-              <a:t>Multi-omics Analysis</a:t>
-            </a:r>
-          </a:p>
-          <a:p>
-            <a:pPr lvl="1"/>
-            <a:r>
-              <a:rPr lang="en-US" dirty="0"/>
-              <a:t>DL model development (fine tuning) </a:t>
-            </a:r>
-          </a:p>
-          <a:p>
-            <a:pPr lvl="1"/>
-            <a:r>
-              <a:rPr lang="en-US" dirty="0"/>
-              <a:t>Agent Engineering</a:t>
-            </a:r>
+              <a:t>INPUT &amp; OUTPUT </a:t>
+            </a:r>
+          </a:p>
+          <a:p>
+            <a:pPr marL="457200" lvl="1" indent="0">
+              <a:buNone/>
+            </a:pPr>
+            <a:endParaRPr lang="en-US" dirty="0"/>
           </a:p>
         </p:txBody>
       </p:sp>
     </p:spTree>
     <p:extLst>
       <p:ext uri="{BB962C8B-B14F-4D97-AF65-F5344CB8AC3E}">
-        <p14:creationId xmlns:p14="http://schemas.microsoft.com/office/powerpoint/2010/main" val="187116585"/>
+        <p14:creationId xmlns:p14="http://schemas.microsoft.com/office/powerpoint/2010/main" val="1387331201"/>
       </p:ext>
     </p:extLst>
   </p:cSld>
@@ -4108,85 +8121,73 @@
           <a:chExt cx="0" cy="0"/>
         </a:xfrm>
       </p:grpSpPr>
-      <p:sp>
-        <p:nvSpPr>
-          <p:cNvPr id="2" name="Title 1">
-            <a:extLst>
-              <a:ext uri="{FF2B5EF4-FFF2-40B4-BE49-F238E27FC236}">
-                <a16:creationId xmlns:a16="http://schemas.microsoft.com/office/drawing/2014/main" id="{7C89F797-FF60-325F-5DF3-1A6344DE1DEC}"/>
-              </a:ext>
-            </a:extLst>
-          </p:cNvPr>
-          <p:cNvSpPr>
-            <a:spLocks noGrp="1"/>
-          </p:cNvSpPr>
-          <p:nvPr>
-            <p:ph type="title"/>
-          </p:nvPr>
-        </p:nvSpPr>
-        <p:spPr/>
-        <p:txBody>
-          <a:bodyPr/>
+      <p:pic>
+        <p:nvPicPr>
+          <p:cNvPr id="6" name="Picture 5">
+            <a:extLst>
+              <a:ext uri="{FF2B5EF4-FFF2-40B4-BE49-F238E27FC236}">
+                <a16:creationId xmlns:a16="http://schemas.microsoft.com/office/drawing/2014/main" id="{C8C2E162-DFF5-7312-5184-27F643947BC2}"/>
+              </a:ext>
+            </a:extLst>
+          </p:cNvPr>
+          <p:cNvPicPr>
+            <a:picLocks noChangeAspect="1"/>
+          </p:cNvPicPr>
+          <p:nvPr/>
+        </p:nvPicPr>
+        <p:blipFill>
+          <a:blip r:embed="rId2"/>
+          <a:stretch>
+            <a:fillRect/>
+          </a:stretch>
+        </p:blipFill>
+        <p:spPr>
+          <a:xfrm>
+            <a:off x="699967" y="792003"/>
+            <a:ext cx="11060119" cy="5070926"/>
+          </a:xfrm>
+          <a:prstGeom prst="rect">
+            <a:avLst/>
+          </a:prstGeom>
+        </p:spPr>
+      </p:pic>
+      <p:sp>
+        <p:nvSpPr>
+          <p:cNvPr id="8" name="TextBox 7">
+            <a:extLst>
+              <a:ext uri="{FF2B5EF4-FFF2-40B4-BE49-F238E27FC236}">
+                <a16:creationId xmlns:a16="http://schemas.microsoft.com/office/drawing/2014/main" id="{0A05FD6B-7E8A-D1F4-777B-E3E3E6AA2D69}"/>
+              </a:ext>
+            </a:extLst>
+          </p:cNvPr>
+          <p:cNvSpPr txBox="1"/>
+          <p:nvPr/>
+        </p:nvSpPr>
+        <p:spPr>
+          <a:xfrm>
+            <a:off x="3295425" y="6135932"/>
+            <a:ext cx="6096000" cy="369332"/>
+          </a:xfrm>
+          <a:prstGeom prst="rect">
+            <a:avLst/>
+          </a:prstGeom>
+          <a:noFill/>
+        </p:spPr>
+        <p:txBody>
+          <a:bodyPr wrap="square">
+            <a:spAutoFit/>
+          </a:bodyPr>
           <a:lstStyle/>
           <a:p>
             <a:r>
+              <a:rPr lang="en-US" dirty="0">
+                <a:hlinkClick r:id="rId3"/>
+              </a:rPr>
+              <a:t>https://claude.ai/artifact/VkNjGDDxE9S8b8eZsnMpjv</a:t>
+            </a:r>
+            <a:r>
               <a:rPr lang="en-US" dirty="0"/>
-              <a:t>Abstain-DTI </a:t>
-            </a:r>
-            <a:r>
-              <a:rPr lang="ko-KR" altLang="en-US" dirty="0" err="1"/>
-              <a:t>를</a:t>
-            </a:r>
-            <a:r>
-              <a:rPr lang="ko-KR" altLang="en-US" dirty="0"/>
-              <a:t> 위한 </a:t>
-            </a:r>
-            <a:r>
-              <a:rPr lang="ko-KR" altLang="en-US" dirty="0" err="1"/>
-              <a:t>온보딩</a:t>
-            </a:r>
-            <a:endParaRPr lang="en-US" dirty="0"/>
-          </a:p>
-        </p:txBody>
-      </p:sp>
-      <p:sp>
-        <p:nvSpPr>
-          <p:cNvPr id="3" name="Content Placeholder 2">
-            <a:extLst>
-              <a:ext uri="{FF2B5EF4-FFF2-40B4-BE49-F238E27FC236}">
-                <a16:creationId xmlns:a16="http://schemas.microsoft.com/office/drawing/2014/main" id="{9C5F5993-7D5F-43F6-F67A-2FD8FDE9D442}"/>
-              </a:ext>
-            </a:extLst>
-          </p:cNvPr>
-          <p:cNvSpPr>
-            <a:spLocks noGrp="1"/>
-          </p:cNvSpPr>
-          <p:nvPr>
-            <p:ph idx="1"/>
-          </p:nvPr>
-        </p:nvSpPr>
-        <p:spPr/>
-        <p:txBody>
-          <a:bodyPr/>
-          <a:lstStyle/>
-          <a:p>
-            <a:r>
-              <a:rPr lang="ko-KR" altLang="en-US" dirty="0"/>
-              <a:t>문제 정의 </a:t>
-            </a:r>
-            <a:endParaRPr lang="en-US" altLang="ko-KR" dirty="0"/>
-          </a:p>
-          <a:p>
-            <a:r>
-              <a:rPr lang="ko-KR" altLang="en-US" dirty="0"/>
-              <a:t>난이도 정의 </a:t>
-            </a:r>
-            <a:endParaRPr lang="en-US" altLang="ko-KR" dirty="0"/>
-          </a:p>
-          <a:p>
-            <a:r>
-              <a:rPr lang="en-US" dirty="0"/>
-              <a:t>INPUT &amp; OUTPUT </a:t>
+              <a:t> </a:t>
             </a:r>
           </a:p>
         </p:txBody>
@@ -4194,7 +8195,7 @@
     </p:spTree>
     <p:extLst>
       <p:ext uri="{BB962C8B-B14F-4D97-AF65-F5344CB8AC3E}">
-        <p14:creationId xmlns:p14="http://schemas.microsoft.com/office/powerpoint/2010/main" val="1387331201"/>
+        <p14:creationId xmlns:p14="http://schemas.microsoft.com/office/powerpoint/2010/main" val="2247093016"/>
       </p:ext>
     </p:extLst>
   </p:cSld>
@@ -4221,81 +8222,149 @@
           <a:chExt cx="0" cy="0"/>
         </a:xfrm>
       </p:grpSpPr>
-      <p:pic>
-        <p:nvPicPr>
-          <p:cNvPr id="6" name="Picture 5">
-            <a:extLst>
-              <a:ext uri="{FF2B5EF4-FFF2-40B4-BE49-F238E27FC236}">
-                <a16:creationId xmlns:a16="http://schemas.microsoft.com/office/drawing/2014/main" id="{C8C2E162-DFF5-7312-5184-27F643947BC2}"/>
-              </a:ext>
-            </a:extLst>
-          </p:cNvPr>
-          <p:cNvPicPr>
-            <a:picLocks noChangeAspect="1"/>
-          </p:cNvPicPr>
-          <p:nvPr/>
-        </p:nvPicPr>
-        <p:blipFill>
-          <a:blip r:embed="rId2"/>
-          <a:stretch>
-            <a:fillRect/>
-          </a:stretch>
-        </p:blipFill>
-        <p:spPr>
-          <a:xfrm>
-            <a:off x="699967" y="792003"/>
-            <a:ext cx="11060119" cy="5070926"/>
-          </a:xfrm>
-          <a:prstGeom prst="rect">
-            <a:avLst/>
-          </a:prstGeom>
-        </p:spPr>
-      </p:pic>
-      <p:sp>
-        <p:nvSpPr>
-          <p:cNvPr id="8" name="TextBox 7">
-            <a:extLst>
-              <a:ext uri="{FF2B5EF4-FFF2-40B4-BE49-F238E27FC236}">
-                <a16:creationId xmlns:a16="http://schemas.microsoft.com/office/drawing/2014/main" id="{0A05FD6B-7E8A-D1F4-777B-E3E3E6AA2D69}"/>
-              </a:ext>
-            </a:extLst>
-          </p:cNvPr>
-          <p:cNvSpPr txBox="1"/>
-          <p:nvPr/>
-        </p:nvSpPr>
-        <p:spPr>
-          <a:xfrm>
-            <a:off x="3295425" y="6135932"/>
-            <a:ext cx="6096000" cy="369332"/>
-          </a:xfrm>
-          <a:prstGeom prst="rect">
-            <a:avLst/>
-          </a:prstGeom>
-          <a:noFill/>
-        </p:spPr>
-        <p:txBody>
-          <a:bodyPr wrap="square">
-            <a:spAutoFit/>
+      <p:sp>
+        <p:nvSpPr>
+          <p:cNvPr id="2" name="Title 1">
+            <a:extLst>
+              <a:ext uri="{FF2B5EF4-FFF2-40B4-BE49-F238E27FC236}">
+                <a16:creationId xmlns:a16="http://schemas.microsoft.com/office/drawing/2014/main" id="{4F0A2238-82A5-A975-472A-4789B67CF921}"/>
+              </a:ext>
+            </a:extLst>
+          </p:cNvPr>
+          <p:cNvSpPr>
+            <a:spLocks noGrp="1"/>
+          </p:cNvSpPr>
+          <p:nvPr>
+            <p:ph type="title"/>
+          </p:nvPr>
+        </p:nvSpPr>
+        <p:spPr/>
+        <p:txBody>
+          <a:bodyPr/>
+          <a:lstStyle/>
+          <a:p>
+            <a:r>
+              <a:rPr lang="en-US" altLang="ko-KR" dirty="0"/>
+              <a:t>Feedbacks will be given by</a:t>
+            </a:r>
+            <a:endParaRPr lang="en-US" dirty="0"/>
+          </a:p>
+        </p:txBody>
+      </p:sp>
+      <p:sp>
+        <p:nvSpPr>
+          <p:cNvPr id="3" name="Content Placeholder 2">
+            <a:extLst>
+              <a:ext uri="{FF2B5EF4-FFF2-40B4-BE49-F238E27FC236}">
+                <a16:creationId xmlns:a16="http://schemas.microsoft.com/office/drawing/2014/main" id="{60F0E320-5F67-4442-564E-EAEFF6C52AC8}"/>
+              </a:ext>
+            </a:extLst>
+          </p:cNvPr>
+          <p:cNvSpPr>
+            <a:spLocks noGrp="1"/>
+          </p:cNvSpPr>
+          <p:nvPr>
+            <p:ph idx="1"/>
+          </p:nvPr>
+        </p:nvSpPr>
+        <p:spPr/>
+        <p:txBody>
+          <a:bodyPr>
+            <a:normAutofit/>
           </a:bodyPr>
           <a:lstStyle/>
           <a:p>
             <a:r>
-              <a:rPr lang="en-US" dirty="0">
+              <a:rPr lang="en-US" sz="2400" dirty="0"/>
+              <a:t>UW Andre Berndt Lab postdoc </a:t>
+            </a:r>
+            <a:r>
+              <a:rPr lang="ko-KR" altLang="en-US" sz="2400" dirty="0" err="1"/>
+              <a:t>이다호</a:t>
+            </a:r>
+            <a:r>
+              <a:rPr lang="ko-KR" altLang="en-US" sz="2400" dirty="0"/>
+              <a:t> 박사님</a:t>
+            </a:r>
+            <a:r>
+              <a:rPr lang="en-US" altLang="ko-KR" sz="2400" dirty="0"/>
+              <a:t> </a:t>
+            </a:r>
+            <a:r>
+              <a:rPr lang="en-US" altLang="ko-KR" sz="2400" dirty="0">
+                <a:hlinkClick r:id="rId2"/>
+              </a:rPr>
+              <a:t>https://scholar.google.com/citations?user=hpQO_7QAAAAJ&amp;hl=en</a:t>
+            </a:r>
+            <a:r>
+              <a:rPr lang="en-US" altLang="ko-KR" sz="2400" dirty="0"/>
+              <a:t> </a:t>
+            </a:r>
+          </a:p>
+          <a:p>
+            <a:r>
+              <a:rPr lang="en-US" altLang="ko-KR" sz="2400" dirty="0"/>
+              <a:t>UW David Baker Lab postdoc </a:t>
+            </a:r>
+            <a:r>
+              <a:rPr lang="ko-KR" altLang="en-US" sz="2400" dirty="0" err="1"/>
+              <a:t>신호정박사님</a:t>
+            </a:r>
+            <a:r>
+              <a:rPr lang="en-US" altLang="ko-KR" sz="2400" dirty="0"/>
+              <a:t> </a:t>
+            </a:r>
+            <a:r>
+              <a:rPr lang="en-US" altLang="ko-KR" sz="2400" dirty="0">
                 <a:hlinkClick r:id="rId3"/>
               </a:rPr>
-              <a:t>https://claude.ai/artifact/VkNjGDDxE9S8b8eZsnMpjv</a:t>
-            </a:r>
-            <a:r>
-              <a:rPr lang="en-US" dirty="0"/>
+              <a:t>https://scholar.google.com/citations?user=_PQ86mEAAAAJ&amp;hl=ko</a:t>
+            </a:r>
+            <a:r>
+              <a:rPr lang="en-US" altLang="ko-KR" sz="2400" dirty="0"/>
               <a:t> </a:t>
             </a:r>
+          </a:p>
+          <a:p>
+            <a:r>
+              <a:rPr lang="en-US" altLang="ko-KR" sz="2400" dirty="0"/>
+              <a:t>Duke </a:t>
+            </a:r>
+            <a:r>
+              <a:rPr lang="en-US" altLang="ko-KR" sz="2400" dirty="0" err="1"/>
+              <a:t>phD</a:t>
+            </a:r>
+            <a:r>
+              <a:rPr lang="en-US" altLang="ko-KR" sz="2400" dirty="0"/>
+              <a:t> candidate </a:t>
+            </a:r>
+            <a:r>
+              <a:rPr lang="ko-KR" altLang="en-US" sz="2400" dirty="0" err="1"/>
+              <a:t>김종현님</a:t>
+            </a:r>
+            <a:endParaRPr lang="en-US" altLang="ko-KR" sz="2400" dirty="0"/>
+          </a:p>
+          <a:p>
+            <a:pPr lvl="1"/>
+            <a:r>
+              <a:rPr lang="en-US" sz="2000" dirty="0"/>
+              <a:t>Kim, J. and Romero, P.A. (2026) ‘Benchmarking and behavioral characterization of LLM agents for protein design’, bioRxiv</a:t>
+            </a:r>
+            <a:r>
+              <a:rPr lang="ko-KR" altLang="en-US" sz="2000" dirty="0"/>
+              <a:t> </a:t>
+            </a:r>
+            <a:endParaRPr lang="en-US" altLang="ko-KR" sz="2000" dirty="0"/>
+          </a:p>
+          <a:p>
+            <a:endParaRPr lang="en-US" sz="2400" dirty="0"/>
           </a:p>
         </p:txBody>
       </p:sp>
     </p:spTree>
     <p:extLst>
       <p:ext uri="{BB962C8B-B14F-4D97-AF65-F5344CB8AC3E}">
-        <p14:creationId xmlns:p14="http://schemas.microsoft.com/office/powerpoint/2010/main" val="2247093016"/>
+        <p14:creationId xmlns:p14="http://schemas.microsoft.com/office/powerpoint/2010/main" val="549740943"/>
       </p:ext>
     </p:extLst>
   </p:cSld>
@@ -4327,7 +8396,7 @@
           <p:cNvPr id="2" name="Title 1">
             <a:extLst>
               <a:ext uri="{FF2B5EF4-FFF2-40B4-BE49-F238E27FC236}">
-                <a16:creationId xmlns:a16="http://schemas.microsoft.com/office/drawing/2014/main" id="{A6F38C4D-1413-86AF-C839-EB908BDEAD0B}"/>
+                <a16:creationId xmlns:a16="http://schemas.microsoft.com/office/drawing/2014/main" id="{60DC0D0C-9A5E-1DC8-B48D-462EC113779B}"/>
               </a:ext>
             </a:extLst>
           </p:cNvPr>
@@ -4338,151 +8407,26 @@
             <p:ph type="title"/>
           </p:nvPr>
         </p:nvSpPr>
-        <p:spPr/>
+        <p:spPr>
+          <a:xfrm>
+            <a:off x="831850" y="1709738"/>
+            <a:ext cx="10515600" cy="2852737"/>
+          </a:xfrm>
+        </p:spPr>
         <p:txBody>
           <a:bodyPr/>
           <a:lstStyle/>
           <a:p>
-            <a:r>
-              <a:rPr lang="en-US" dirty="0"/>
-              <a:t>PR </a:t>
-            </a:r>
-            <a:r>
-              <a:rPr lang="ko-KR" altLang="en-US" dirty="0"/>
-              <a:t>올리기 </a:t>
-            </a:r>
-            <a:endParaRPr lang="en-US" dirty="0"/>
-          </a:p>
-        </p:txBody>
-      </p:sp>
-      <p:sp>
-        <p:nvSpPr>
-          <p:cNvPr id="3" name="Content Placeholder 2">
-            <a:extLst>
-              <a:ext uri="{FF2B5EF4-FFF2-40B4-BE49-F238E27FC236}">
-                <a16:creationId xmlns:a16="http://schemas.microsoft.com/office/drawing/2014/main" id="{BC87AD51-0F9E-503D-3B0F-AD0D22C8B580}"/>
-              </a:ext>
-            </a:extLst>
-          </p:cNvPr>
-          <p:cNvSpPr>
-            <a:spLocks noGrp="1"/>
-          </p:cNvSpPr>
-          <p:nvPr>
-            <p:ph idx="1"/>
-          </p:nvPr>
-        </p:nvSpPr>
-        <p:spPr/>
-        <p:txBody>
-          <a:bodyPr/>
-          <a:lstStyle/>
-          <a:p>
-            <a:r>
-              <a:rPr lang="en-US" dirty="0">
-                <a:hlinkClick r:id="rId2"/>
-              </a:rPr>
-              <a:t>https://github.com/Pseudo-Lab/abstain-dti</a:t>
-            </a:r>
-            <a:endParaRPr lang="en-US" dirty="0"/>
-          </a:p>
-          <a:p>
-            <a:pPr lvl="1"/>
-            <a:r>
-              <a:rPr lang="ko-KR" altLang="en-US" dirty="0"/>
-              <a:t>자기 트랙</a:t>
-            </a:r>
-            <a:r>
-              <a:rPr lang="en-US" altLang="ko-KR" dirty="0"/>
-              <a:t> branch </a:t>
-            </a:r>
-            <a:r>
-              <a:rPr lang="ko-KR" altLang="en-US" dirty="0"/>
-              <a:t>사용 </a:t>
-            </a:r>
-            <a:r>
-              <a:rPr lang="en-US" altLang="ko-KR" dirty="0"/>
-              <a:t>-&gt;</a:t>
-            </a:r>
-            <a:r>
-              <a:rPr lang="ko-KR" altLang="en-US" dirty="0"/>
-              <a:t> </a:t>
-            </a:r>
-            <a:r>
-              <a:rPr lang="en-US" altLang="ko-KR" dirty="0"/>
-              <a:t>dev</a:t>
-            </a:r>
-            <a:r>
-              <a:rPr lang="ko-KR" altLang="en-US" dirty="0"/>
-              <a:t> 로 </a:t>
-            </a:r>
-            <a:r>
-              <a:rPr lang="en-US" altLang="ko-KR" dirty="0"/>
-              <a:t>PR (at least one reviewer) </a:t>
-            </a:r>
-            <a:endParaRPr lang="en-US" dirty="0"/>
-          </a:p>
-          <a:p>
-            <a:r>
-              <a:rPr lang="en-US" dirty="0" err="1"/>
-              <a:t>REAMD.md</a:t>
-            </a:r>
-            <a:r>
-              <a:rPr lang="en-US" dirty="0"/>
-              <a:t> </a:t>
-            </a:r>
-            <a:r>
-              <a:rPr lang="ko-KR" altLang="en-US" dirty="0"/>
-              <a:t>팀 테이블 이름에 </a:t>
-            </a:r>
-            <a:r>
-              <a:rPr lang="ko-KR" altLang="en-US" dirty="0" err="1"/>
-              <a:t>깃헙</a:t>
-            </a:r>
-            <a:r>
-              <a:rPr lang="ko-KR" altLang="en-US" dirty="0"/>
-              <a:t> 링크 언급 </a:t>
-            </a:r>
-            <a:endParaRPr lang="en-US" altLang="ko-KR" dirty="0"/>
-          </a:p>
-          <a:p>
-            <a:r>
-              <a:rPr lang="ko-KR" altLang="en-US" dirty="0"/>
-              <a:t>다음주 발표할 논문 올리기 </a:t>
-            </a:r>
-            <a:endParaRPr lang="en-US" altLang="ko-KR" dirty="0"/>
-          </a:p>
-          <a:p>
-            <a:r>
-              <a:rPr lang="ko-KR" altLang="en-US" dirty="0"/>
-              <a:t>논문 </a:t>
-            </a:r>
-            <a:r>
-              <a:rPr lang="en-US" altLang="ko-KR" dirty="0"/>
-              <a:t>-&gt;</a:t>
-            </a:r>
-            <a:r>
-              <a:rPr lang="ko-KR" altLang="en-US" dirty="0"/>
-              <a:t> 실행 </a:t>
-            </a:r>
-            <a:r>
-              <a:rPr lang="en-US" altLang="ko-KR" dirty="0">
-                <a:hlinkClick r:id="rId3"/>
-              </a:rPr>
-              <a:t>https://github.com/ybaeus/Paper2Agent</a:t>
-            </a:r>
-            <a:r>
-              <a:rPr lang="ko-KR" altLang="en-US" dirty="0"/>
-              <a:t> </a:t>
-            </a:r>
-            <a:endParaRPr lang="en-US" dirty="0"/>
+            <a:pPr marL="0" lvl="0" indent="0">
+              <a:buNone/>
+            </a:pPr>
+            <a:r>
+              <a:t>문제 정의</a:t>
+            </a:r>
           </a:p>
         </p:txBody>
       </p:sp>
     </p:spTree>
-    <p:extLst>
-      <p:ext uri="{BB962C8B-B14F-4D97-AF65-F5344CB8AC3E}">
-        <p14:creationId xmlns:p14="http://schemas.microsoft.com/office/powerpoint/2010/main" val="1369553910"/>
-      </p:ext>
-    </p:extLst>
   </p:cSld>
   <p:clrMapOvr>
     <a:masterClrMapping/>
@@ -4512,7 +8456,7 @@
           <p:cNvPr id="2" name="Title 1">
             <a:extLst>
               <a:ext uri="{FF2B5EF4-FFF2-40B4-BE49-F238E27FC236}">
-                <a16:creationId xmlns:a16="http://schemas.microsoft.com/office/drawing/2014/main" id="{4F0A2238-82A5-A975-472A-4789B67CF921}"/>
+                <a16:creationId xmlns:a16="http://schemas.microsoft.com/office/drawing/2014/main" id="{1A5592C5-AEA2-D627-F76B-35C7AD5ED253}"/>
               </a:ext>
             </a:extLst>
           </p:cNvPr>
@@ -4523,141 +8467,308 @@
             <p:ph type="title"/>
           </p:nvPr>
         </p:nvSpPr>
-        <p:spPr/>
+        <p:spPr>
+          <a:xfrm>
+            <a:off x="839788" y="457200"/>
+            <a:ext cx="8538990" cy="989012"/>
+          </a:xfrm>
+        </p:spPr>
         <p:txBody>
           <a:bodyPr/>
           <a:lstStyle/>
           <a:p>
+            <a:pPr marL="0" lvl="0" indent="0">
+              <a:buNone/>
+            </a:pPr>
+            <a:r>
+              <a:rPr dirty="0" err="1"/>
+              <a:t>무엇이</a:t>
+            </a:r>
+            <a:r>
+              <a:rPr dirty="0"/>
+              <a:t> </a:t>
+            </a:r>
+            <a:r>
+              <a:rPr dirty="0" err="1"/>
+              <a:t>문제인가</a:t>
+            </a:r>
+            <a:endParaRPr dirty="0"/>
+          </a:p>
+        </p:txBody>
+      </p:sp>
+      <p:sp>
+        <p:nvSpPr>
+          <p:cNvPr id="4" name="Text Placeholder 3">
+            <a:extLst>
+              <a:ext uri="{FF2B5EF4-FFF2-40B4-BE49-F238E27FC236}">
+                <a16:creationId xmlns:a16="http://schemas.microsoft.com/office/drawing/2014/main" id="{67344C6D-89EA-24AC-1FF8-F95BD1763393}"/>
+              </a:ext>
+            </a:extLst>
+          </p:cNvPr>
+          <p:cNvSpPr>
+            <a:spLocks noGrp="1"/>
+          </p:cNvSpPr>
+          <p:nvPr>
+            <p:ph type="body" sz="half" idx="2"/>
+          </p:nvPr>
+        </p:nvSpPr>
+        <p:spPr>
+          <a:xfrm>
+            <a:off x="839788" y="1523206"/>
+            <a:ext cx="10787920" cy="3811588"/>
+          </a:xfrm>
+        </p:spPr>
+        <p:txBody>
+          <a:bodyPr/>
+          <a:lstStyle/>
+          <a:p>
+            <a:r>
+              <a:rPr dirty="0"/>
+              <a:t>“</a:t>
+            </a:r>
+            <a:r>
+              <a:rPr lang="en-US" dirty="0"/>
+              <a:t>AI </a:t>
+            </a:r>
+            <a:r>
+              <a:rPr lang="ko-KR" altLang="en-US" dirty="0"/>
+              <a:t>신약 발굴 모델은 자기가 틀릴 때를 아는가</a:t>
+            </a:r>
             <a:r>
               <a:rPr lang="en-US" altLang="ko-KR" dirty="0"/>
-              <a:t>Feedbacks will be given by</a:t>
-            </a:r>
-            <a:endParaRPr lang="en-US" dirty="0"/>
-          </a:p>
-        </p:txBody>
-      </p:sp>
-      <p:sp>
-        <p:nvSpPr>
-          <p:cNvPr id="3" name="Content Placeholder 2">
-            <a:extLst>
-              <a:ext uri="{FF2B5EF4-FFF2-40B4-BE49-F238E27FC236}">
-                <a16:creationId xmlns:a16="http://schemas.microsoft.com/office/drawing/2014/main" id="{60F0E320-5F67-4442-564E-EAEFF6C52AC8}"/>
-              </a:ext>
-            </a:extLst>
-          </p:cNvPr>
-          <p:cNvSpPr>
-            <a:spLocks noGrp="1"/>
-          </p:cNvSpPr>
-          <p:nvPr>
-            <p:ph idx="1"/>
-          </p:nvPr>
-        </p:nvSpPr>
-        <p:spPr/>
-        <p:txBody>
-          <a:bodyPr>
-            <a:normAutofit/>
+              <a:t>?</a:t>
+            </a:r>
+            <a:r>
+              <a:rPr dirty="0"/>
+              <a:t>”</a:t>
+            </a:r>
+            <a:r>
+              <a:rPr lang="en-US" dirty="0"/>
+              <a:t> -&gt; </a:t>
+            </a:r>
+            <a:r>
+              <a:rPr lang="ko-KR" altLang="en-US" dirty="0"/>
+              <a:t>답할 근거가 없는 입력에 쉬운 입력과 같은 신뢰도로 답한다</a:t>
+            </a:r>
+          </a:p>
+          <a:p>
+            <a:endParaRPr dirty="0"/>
+          </a:p>
+        </p:txBody>
+      </p:sp>
+      <p:sp>
+        <p:nvSpPr>
+          <p:cNvPr id="12" name="TextBox 11">
+            <a:extLst>
+              <a:ext uri="{FF2B5EF4-FFF2-40B4-BE49-F238E27FC236}">
+                <a16:creationId xmlns:a16="http://schemas.microsoft.com/office/drawing/2014/main" id="{E5780BB4-34F0-6563-4E23-E531C2FE796E}"/>
+              </a:ext>
+            </a:extLst>
+          </p:cNvPr>
+          <p:cNvSpPr txBox="1"/>
+          <p:nvPr/>
+        </p:nvSpPr>
+        <p:spPr>
+          <a:xfrm>
+            <a:off x="-444843" y="2105561"/>
+            <a:ext cx="11565924" cy="1015663"/>
+          </a:xfrm>
+          <a:prstGeom prst="rect">
+            <a:avLst/>
+          </a:prstGeom>
+          <a:noFill/>
+        </p:spPr>
+        <p:txBody>
+          <a:bodyPr wrap="square">
+            <a:spAutoFit/>
           </a:bodyPr>
           <a:lstStyle/>
           <a:p>
+            <a:pPr marL="1270000" lvl="0" indent="0">
+              <a:buNone/>
+            </a:pPr>
+            <a:r>
+              <a:rPr lang="en-US" sz="2000" dirty="0"/>
+              <a:t>DTI </a:t>
+            </a:r>
+            <a:r>
+              <a:rPr lang="ko-KR" altLang="en-US" sz="2000" dirty="0" err="1"/>
+              <a:t>예측기</a:t>
+            </a:r>
+            <a:r>
+              <a:rPr lang="en-US" altLang="ko-KR" sz="2000" dirty="0"/>
+              <a:t>(</a:t>
+            </a:r>
+            <a:r>
+              <a:rPr lang="ko-KR" altLang="en-US" sz="2000" dirty="0"/>
+              <a:t>지도학습 모델이든 </a:t>
+            </a:r>
+            <a:r>
+              <a:rPr lang="en-US" sz="2000" dirty="0"/>
+              <a:t>LLM </a:t>
+            </a:r>
+            <a:r>
+              <a:rPr lang="ko-KR" altLang="en-US" sz="2000" dirty="0" err="1"/>
+              <a:t>에이전트든</a:t>
+            </a:r>
+            <a:r>
+              <a:rPr lang="en-US" altLang="ko-KR" sz="2000" dirty="0"/>
+              <a:t>)</a:t>
+            </a:r>
+            <a:r>
+              <a:rPr lang="ko-KR" altLang="en-US" sz="2000" dirty="0"/>
+              <a:t>는 입력이 자기가 아는 범위를 벗어나도 신뢰도를 낮추지 않을 수 있다</a:t>
+            </a:r>
+            <a:r>
+              <a:rPr lang="en-US" altLang="ko-KR" sz="2000" dirty="0"/>
+              <a:t>. </a:t>
+            </a:r>
+            <a:r>
+              <a:rPr lang="ko-KR" altLang="en-US" sz="2000" dirty="0"/>
+              <a:t>지금까지의 평가는 정확도를 난이도별로 나눠 보았을 뿐</a:t>
+            </a:r>
+            <a:r>
+              <a:rPr lang="en-US" altLang="ko-KR" sz="2000" dirty="0"/>
+              <a:t>, </a:t>
+            </a:r>
+            <a:r>
+              <a:rPr lang="ko-KR" altLang="en-US" sz="2000" dirty="0"/>
+              <a:t>신뢰도와 기권이 그 난이도를 따라가는지는 재지 않아</a:t>
+            </a:r>
+            <a:r>
+              <a:rPr lang="en-US" altLang="ko-KR" sz="2000" dirty="0"/>
+              <a:t>, </a:t>
+            </a:r>
+            <a:r>
+              <a:rPr lang="ko-KR" altLang="en-US" sz="2000" dirty="0"/>
+              <a:t>이 결함이 있는지 알 수 없었다</a:t>
+            </a:r>
+            <a:r>
+              <a:rPr lang="en-US" altLang="ko-KR" sz="2000" dirty="0"/>
+              <a:t>.</a:t>
+            </a:r>
+          </a:p>
+        </p:txBody>
+      </p:sp>
+      <p:sp>
+        <p:nvSpPr>
+          <p:cNvPr id="14" name="TextBox 13">
+            <a:extLst>
+              <a:ext uri="{FF2B5EF4-FFF2-40B4-BE49-F238E27FC236}">
+                <a16:creationId xmlns:a16="http://schemas.microsoft.com/office/drawing/2014/main" id="{0FC46E5B-7CC9-45DA-2D90-F85A42D285ED}"/>
+              </a:ext>
+            </a:extLst>
+          </p:cNvPr>
+          <p:cNvSpPr txBox="1"/>
+          <p:nvPr/>
+        </p:nvSpPr>
+        <p:spPr>
+          <a:xfrm>
+            <a:off x="839788" y="3441828"/>
+            <a:ext cx="10512424" cy="1569660"/>
+          </a:xfrm>
+          <a:prstGeom prst="rect">
+            <a:avLst/>
+          </a:prstGeom>
+          <a:noFill/>
+        </p:spPr>
+        <p:txBody>
+          <a:bodyPr wrap="square">
+            <a:spAutoFit/>
+          </a:bodyPr>
+          <a:lstStyle/>
+          <a:p>
+            <a:pPr marL="0" lvl="0" indent="0">
+              <a:buNone/>
+            </a:pPr>
+            <a:r>
+              <a:rPr lang="ko-KR" altLang="en-US" sz="2400" b="1" dirty="0"/>
+              <a:t>벤치마크의 질문은 하나입니다</a:t>
+            </a:r>
+            <a:r>
+              <a:rPr lang="en-US" altLang="ko-KR" sz="2400" b="1" dirty="0"/>
+              <a:t>.</a:t>
+            </a:r>
+            <a:r>
+              <a:rPr lang="ko-KR" altLang="en-US" sz="2400" dirty="0"/>
+              <a:t> 신뢰도</a:t>
+            </a:r>
+            <a:r>
+              <a:rPr lang="en-US" altLang="ko-KR" sz="2400" dirty="0"/>
+              <a:t>, </a:t>
+            </a:r>
+            <a:r>
+              <a:rPr lang="ko-KR" altLang="en-US" sz="2400" dirty="0"/>
+              <a:t>또는 기권 결정이 사전에 정한 난이도 </a:t>
+            </a:r>
             <a:r>
               <a:rPr lang="en-US" sz="2400" dirty="0"/>
-              <a:t>UW Andre Berndt Lab postdoc </a:t>
+              <a:t>d(x)</a:t>
             </a:r>
             <a:r>
               <a:rPr lang="ko-KR" altLang="en-US" sz="2400" dirty="0" err="1"/>
-              <a:t>이다호</a:t>
+              <a:t>를</a:t>
             </a:r>
             <a:r>
               <a:rPr lang="ko-KR" altLang="en-US" sz="2400" dirty="0"/>
-              <a:t> 박사님</a:t>
+              <a:t> 따라가는가</a:t>
             </a:r>
             <a:r>
               <a:rPr lang="en-US" altLang="ko-KR" sz="2400" dirty="0"/>
-              <a:t> </a:t>
-            </a:r>
-            <a:r>
-              <a:rPr lang="en-US" altLang="ko-KR" sz="2400" dirty="0">
-                <a:hlinkClick r:id="rId2"/>
-              </a:rPr>
-              <a:t>https</a:t>
-            </a:r>
-            <a:r>
-              <a:rPr lang="en-US" altLang="ko-KR" sz="2400" dirty="0">
-                <a:hlinkClick r:id="rId2"/>
-              </a:rPr>
-              <a:t>://scholar.google.com/citations?user=hpQO_7QAAAAJ&amp;hl=en</a:t>
+              <a:t>? “</a:t>
+            </a:r>
+            <a:r>
+              <a:rPr lang="ko-KR" altLang="en-US" sz="2400" dirty="0"/>
+              <a:t>결함이 </a:t>
+            </a:r>
+            <a:r>
+              <a:rPr lang="ko-KR" altLang="en-US" sz="2400" dirty="0" err="1"/>
+              <a:t>있다”가</a:t>
+            </a:r>
+            <a:r>
+              <a:rPr lang="ko-KR" altLang="en-US" sz="2400" dirty="0"/>
+              <a:t> 아니라 “아무도 재지 </a:t>
+            </a:r>
+            <a:r>
+              <a:rPr lang="ko-KR" altLang="en-US" sz="2400" dirty="0" err="1"/>
+              <a:t>않았다”고</a:t>
+            </a:r>
+            <a:r>
+              <a:rPr lang="ko-KR" altLang="en-US" sz="2400" dirty="0"/>
+              <a:t> 씁니다</a:t>
             </a:r>
             <a:r>
               <a:rPr lang="en-US" altLang="ko-KR" sz="2400" dirty="0"/>
-              <a:t> </a:t>
-            </a:r>
-          </a:p>
-          <a:p>
+              <a:t>. </a:t>
+            </a:r>
+            <a:r>
+              <a:rPr lang="ko-KR" altLang="en-US" sz="2400" dirty="0"/>
+              <a:t>결함의 직접 근거는 아직 없습니다</a:t>
+            </a:r>
             <a:r>
               <a:rPr lang="en-US" altLang="ko-KR" sz="2400" dirty="0"/>
-              <a:t>UW David Baker Lab postdoc </a:t>
-            </a:r>
-            <a:r>
-              <a:rPr lang="ko-KR" altLang="en-US" sz="2400" dirty="0" err="1"/>
-              <a:t>신호정박사님</a:t>
+              <a:t>.</a:t>
+            </a:r>
+            <a:r>
+              <a:rPr lang="ko-KR" altLang="en-US" sz="2400" dirty="0"/>
+              <a:t> 정답을 보기 전에 정할 수 있는 난이도 좌표가 필요합니다</a:t>
             </a:r>
             <a:r>
               <a:rPr lang="en-US" altLang="ko-KR" sz="2400" dirty="0"/>
-              <a:t> </a:t>
-            </a:r>
-            <a:r>
-              <a:rPr lang="en-US" altLang="ko-KR" sz="2400" dirty="0">
-                <a:hlinkClick r:id="rId3"/>
-              </a:rPr>
-              <a:t>https://scholar.google.com/citations?user=_PQ86mEAAAAJ&amp;hl=ko</a:t>
+              <a:t>. </a:t>
+            </a:r>
+            <a:r>
+              <a:rPr lang="ko-KR" altLang="en-US" sz="2400" dirty="0"/>
+              <a:t>다음 절에서 정의합니다</a:t>
             </a:r>
             <a:r>
               <a:rPr lang="en-US" altLang="ko-KR" sz="2400" dirty="0"/>
-              <a:t> </a:t>
-            </a:r>
-          </a:p>
-          <a:p>
-            <a:r>
-              <a:rPr lang="en-US" altLang="ko-KR" sz="2400" dirty="0"/>
-              <a:t>Duke </a:t>
-            </a:r>
-            <a:r>
-              <a:rPr lang="en-US" altLang="ko-KR" sz="2400" dirty="0" err="1"/>
-              <a:t>phD</a:t>
-            </a:r>
-            <a:r>
-              <a:rPr lang="en-US" altLang="ko-KR" sz="2400" dirty="0"/>
-              <a:t> candidate </a:t>
-            </a:r>
-            <a:r>
-              <a:rPr lang="ko-KR" altLang="en-US" sz="2400" dirty="0" err="1"/>
-              <a:t>김종현님</a:t>
-            </a:r>
-            <a:endParaRPr lang="en-US" altLang="ko-KR" sz="2400" dirty="0"/>
-          </a:p>
-          <a:p>
-            <a:pPr lvl="1"/>
-            <a:r>
-              <a:rPr lang="en-US" sz="2000" dirty="0"/>
-              <a:t>Kim, J. and Romero, P.A. (2026) ‘Benchmarking and behavioral characterization of LLM agents for protein design’, bioRxiv</a:t>
-            </a:r>
-            <a:r>
-              <a:rPr lang="ko-KR" altLang="en-US" sz="2000" dirty="0"/>
-              <a:t> </a:t>
-            </a:r>
-            <a:endParaRPr lang="en-US" altLang="ko-KR" sz="2000" dirty="0"/>
-          </a:p>
-          <a:p>
-            <a:endParaRPr lang="en-US" sz="2400" dirty="0"/>
+              <a:t>.</a:t>
+            </a:r>
           </a:p>
         </p:txBody>
       </p:sp>
     </p:spTree>
-    <p:extLst>
-      <p:ext uri="{BB962C8B-B14F-4D97-AF65-F5344CB8AC3E}">
-        <p14:creationId xmlns:p14="http://schemas.microsoft.com/office/powerpoint/2010/main" val="549740943"/>
-      </p:ext>
-    </p:extLst>
   </p:cSld>
   <p:clrMapOvr>
     <a:masterClrMapping/>
